--- a/Grammar_Mastery/03_Nouns/GM-N-04_Sound_Feminine_Plural.pptx
+++ b/Grammar_Mastery/03_Nouns/GM-N-04_Sound_Feminine_Plural.pptx
@@ -531,7 +531,11 @@
           <a:lstStyle/>
           <a:p>
             <a:r>
-              <a:rPr lang="en-US" dirty="0"/>
+              <a:rPr lang="ar-SA" dirty="0">
+                <a:latin typeface="Amiri" pitchFamily="2" charset="-78"/>
+                <a:ea typeface="Amiri" pitchFamily="2" charset="-78"/>
+                <a:cs typeface="Amiri" pitchFamily="2" charset="-78"/>
+              </a:rPr>
               <a:t>LESSON AT A GLANCE — planned for 56 minutes, leaving about 4 minutes for Teams delays.
 0–1 Welcome · 1–2 Lesson map · 2–9 Do Now + answers · 9–10 Objectives · 10–13 Grammar words · 13–24 The grammar, step by step · 24–26 Quick check · 26–29 I Do · 29–38 We Do (sort, repair, practise) · 38–49 You Do (read, speak, write on your route) · 49–54 Feedback (model, self-check, exit ticket) · 54–56 Preparation.
 FLEX slides are optional: use them if the class is moving quickly; otherwise the same activities are on the website for homework.
@@ -897,7 +901,11 @@
           <a:lstStyle/>
           <a:p>
             <a:r>
-              <a:rPr lang="en-US" dirty="0"/>
+              <a:rPr lang="ar-SA" dirty="0">
+                <a:latin typeface="Amiri" pitchFamily="2" charset="-78"/>
+                <a:ea typeface="Amiri" pitchFamily="2" charset="-78"/>
+                <a:cs typeface="Amiri" pitchFamily="2" charset="-78"/>
+              </a:rPr>
               <a:t>I DO (3 min) — think aloud at every step: name the rule in English and Arabic as you apply it.
 Stop at شَكَرْتُ: “Object — so for a SINGULAR I would say fatḥa (شَكَرْتُ الْمُعَلِّمَةَ). For THIS plural: kasra.”</a:t>
             </a:r>
@@ -1076,7 +1084,11 @@
           <a:lstStyle/>
           <a:p>
             <a:r>
-              <a:rPr lang="en-US" dirty="0"/>
+              <a:rPr lang="ar-SA" dirty="0">
+                <a:latin typeface="Amiri" pitchFamily="2" charset="-78"/>
+                <a:ea typeface="Amiri" pitchFamily="2" charset="-78"/>
+                <a:cs typeface="Amiri" pitchFamily="2" charset="-78"/>
+              </a:rPr>
               <a:t>WE DO (2 min). Students type S or B. Point out: all eight singulars end in ة — the ة does not decide the plural.</a:t>
             </a:r>
             <a:endParaRPr lang="en-US" dirty="0"/>
@@ -1164,7 +1176,11 @@
           <a:lstStyle/>
           <a:p>
             <a:r>
-              <a:rPr lang="en-US" dirty="0"/>
+              <a:rPr lang="ar-SA" dirty="0">
+                <a:latin typeface="Amiri" pitchFamily="2" charset="-78"/>
+                <a:ea typeface="Amiri" pitchFamily="2" charset="-78"/>
+                <a:cs typeface="Amiri" pitchFamily="2" charset="-78"/>
+              </a:rPr>
               <a:t>WE DO (2 min). Students type S or B. Point out: all eight singulars end in ة — the ة does not decide the plural.</a:t>
             </a:r>
             <a:endParaRPr lang="en-US" dirty="0"/>
@@ -1521,7 +1537,11 @@
           <a:lstStyle/>
           <a:p>
             <a:r>
-              <a:rPr lang="en-US" dirty="0"/>
+              <a:rPr lang="ar-SA" dirty="0">
+                <a:latin typeface="Amiri" pitchFamily="2" charset="-78"/>
+                <a:ea typeface="Amiri" pitchFamily="2" charset="-78"/>
+                <a:cs typeface="Amiri" pitchFamily="2" charset="-78"/>
+              </a:rPr>
               <a:t>WELCOME (1 min) — while students join.
 • Greet each student by name as they arrive: السَّلَامُ عَلَيْكُمْ. Take the register (Pastoral Tracker: attendance 0/1).
 • 2-MINUTE CHECK-IN (SEND training): a private chat to any student who seemed unsettled last lesson — “Are you okay today? 👍 / 👎”.
@@ -1969,7 +1989,11 @@
           <a:lstStyle/>
           <a:p>
             <a:r>
-              <a:rPr lang="en-US" dirty="0"/>
+              <a:rPr lang="ar-SA" dirty="0">
+                <a:latin typeface="Amiri" pitchFamily="2" charset="-78"/>
+                <a:ea typeface="Amiri" pitchFamily="2" charset="-78"/>
+                <a:cs typeface="Amiri" pitchFamily="2" charset="-78"/>
+              </a:rPr>
               <a:t>SPEAKING (3 min) — website task “speak and transform”. Sequence: ● 10s think → ↔ 45s rehearse aloud with mic muted → ◎ two named students on open mic (warned in advance) → + ? the class types one follow-up in chat → ↺ one student summarises.
 Routes: Core uses the Core prompt and stem; Develop the Develop prompt; Stretch the last prompt.
 Website: choose five nouns; say singular and plural, then use each in a sentence. Listen for the object kasra in أُحِبُّ الْمُعَلِّمَاتِ.</a:t>
@@ -2952,7 +2976,11 @@
           <a:lstStyle/>
           <a:p>
             <a:r>
-              <a:rPr lang="en-US" dirty="0"/>
+              <a:rPr lang="ar-SA" dirty="0">
+                <a:latin typeface="Amiri" pitchFamily="2" charset="-78"/>
+                <a:ea typeface="Amiri" pitchFamily="2" charset="-78"/>
+                <a:cs typeface="Amiri" pitchFamily="2" charset="-78"/>
+              </a:rPr>
               <a:t>DO NOW (5 min independent + 2 min going through answers).
 The website Entry Check (questions 1–5) — compare with GM-N-03 (ـُونَ / ـِينَ).
 • Students work silently. Answers go in the chat as five letters only when the timer ends.
@@ -3317,7 +3345,11 @@
           <a:lstStyle/>
           <a:p>
             <a:r>
-              <a:rPr lang="en-US" dirty="0"/>
+              <a:rPr lang="ar-SA" dirty="0">
+                <a:latin typeface="Amiri" pitchFamily="2" charset="-78"/>
+                <a:ea typeface="Amiri" pitchFamily="2" charset="-78"/>
+                <a:cs typeface="Amiri" pitchFamily="2" charset="-78"/>
+              </a:rPr>
               <a:t>PART 1 (3 min) — website section “From ة to ات”.</a:t>
             </a:r>
             <a:endParaRPr lang="en-US" dirty="0"/>
@@ -3405,7 +3437,11 @@
           <a:lstStyle/>
           <a:p>
             <a:r>
-              <a:rPr lang="en-US" dirty="0"/>
+              <a:rPr lang="ar-SA" dirty="0">
+                <a:latin typeface="Amiri" pitchFamily="2" charset="-78"/>
+                <a:ea typeface="Amiri" pitchFamily="2" charset="-78"/>
+                <a:cs typeface="Amiri" pitchFamily="2" charset="-78"/>
+              </a:rPr>
               <a:t>PART 2 (3 min) — website table “Case pattern”. Qur’an: وَعَمِلُوا الصَّالِحَاتِ (object with kasra).</a:t>
             </a:r>
             <a:endParaRPr lang="en-US" dirty="0"/>
@@ -3889,6 +3925,7 @@
                   <a:srgbClr val="D4AF37"/>
                 </a:solidFill>
                 <a:latin typeface="Amiri" pitchFamily="2" charset="-78"/>
+                <a:ea typeface="Amiri" pitchFamily="2" charset="-78"/>
                 <a:cs typeface="Amiri" pitchFamily="2" charset="-78"/>
               </a:rPr>
               <a:t>م</a:t>
@@ -4095,6 +4132,7 @@
                   <a:srgbClr val="D4AF37"/>
                 </a:solidFill>
                 <a:latin typeface="Amiri" pitchFamily="2" charset="-78"/>
+                <a:ea typeface="Amiri" pitchFamily="2" charset="-78"/>
                 <a:cs typeface="Amiri" pitchFamily="2" charset="-78"/>
               </a:rPr>
               <a:t>جَمْعُ الْمُؤَنَّثِ السَّالِمُ</a:t>
@@ -4552,6 +4590,7 @@
                   <a:srgbClr val="D4AF37"/>
                 </a:solidFill>
                 <a:latin typeface="Amiri" pitchFamily="2" charset="-78"/>
+                <a:ea typeface="Amiri" pitchFamily="2" charset="-78"/>
                 <a:cs typeface="Amiri" pitchFamily="2" charset="-78"/>
               </a:rPr>
               <a:t>م</a:t>
@@ -4872,6 +4911,7 @@
                   <a:srgbClr val="8A6D1E"/>
                 </a:solidFill>
                 <a:latin typeface="Amiri" pitchFamily="2" charset="-78"/>
+                <a:ea typeface="Amiri" pitchFamily="2" charset="-78"/>
                 <a:cs typeface="Amiri" pitchFamily="2" charset="-78"/>
               </a:rPr>
               <a:t>الْمُطَابَقَةُ</a:t>
@@ -5152,6 +5192,7 @@
                   <a:srgbClr val="1B3B6F"/>
                 </a:solidFill>
                 <a:latin typeface="Amiri" pitchFamily="2" charset="-78"/>
+                <a:ea typeface="Amiri" pitchFamily="2" charset="-78"/>
                 <a:cs typeface="Amiri" pitchFamily="2" charset="-78"/>
               </a:rPr>
               <a:t>الطَّالِبَاتُ نَشِيطَاتٌ.</a:t>
@@ -5358,6 +5399,7 @@
                   <a:srgbClr val="1B3B6F"/>
                 </a:solidFill>
                 <a:latin typeface="Amiri" pitchFamily="2" charset="-78"/>
+                <a:ea typeface="Amiri" pitchFamily="2" charset="-78"/>
                 <a:cs typeface="Amiri" pitchFamily="2" charset="-78"/>
               </a:rPr>
               <a:t>الْمُعَلِّمَاتُ الْخَبِيرَاتُ</a:t>
@@ -5564,6 +5606,7 @@
                   <a:srgbClr val="1B3B6F"/>
                 </a:solidFill>
                 <a:latin typeface="Amiri" pitchFamily="2" charset="-78"/>
+                <a:ea typeface="Amiri" pitchFamily="2" charset="-78"/>
                 <a:cs typeface="Amiri" pitchFamily="2" charset="-78"/>
               </a:rPr>
               <a:t>السَّيَّارَاتُ سَرِيعَةٌ.</a:t>
@@ -5770,6 +5813,7 @@
                   <a:srgbClr val="1B3B6F"/>
                 </a:solidFill>
                 <a:latin typeface="Amiri" pitchFamily="2" charset="-78"/>
+                <a:ea typeface="Amiri" pitchFamily="2" charset="-78"/>
                 <a:cs typeface="Amiri" pitchFamily="2" charset="-78"/>
               </a:rPr>
               <a:t>الْجَامِعَاتُ الْكَبِيرَةُ</a:t>
@@ -5979,6 +6023,7 @@
                   <a:srgbClr val="D4AF37"/>
                 </a:solidFill>
                 <a:latin typeface="Amiri" pitchFamily="2" charset="-78"/>
+                <a:ea typeface="Amiri" pitchFamily="2" charset="-78"/>
                 <a:cs typeface="Amiri" pitchFamily="2" charset="-78"/>
               </a:rPr>
               <a:t>م</a:t>
@@ -6299,6 +6344,7 @@
                   <a:srgbClr val="8A6D1E"/>
                 </a:solidFill>
                 <a:latin typeface="Amiri" pitchFamily="2" charset="-78"/>
+                <a:ea typeface="Amiri" pitchFamily="2" charset="-78"/>
                 <a:cs typeface="Amiri" pitchFamily="2" charset="-78"/>
               </a:rPr>
               <a:t>فَحْصٌ سَرِيعٌ</a:t>
@@ -6485,6 +6531,7 @@
                   <a:srgbClr val="1B3B6F"/>
                 </a:solidFill>
                 <a:latin typeface="Amiri" pitchFamily="2" charset="-78"/>
+                <a:ea typeface="Amiri" pitchFamily="2" charset="-78"/>
                 <a:cs typeface="Amiri" pitchFamily="2" charset="-78"/>
               </a:rPr>
               <a:t>مُدَرِّسَةٌ</a:t>
@@ -6599,6 +6646,7 @@
                   <a:srgbClr val="1F2A37"/>
                 </a:solidFill>
                 <a:latin typeface="Amiri" pitchFamily="2" charset="-78"/>
+                <a:ea typeface="Amiri" pitchFamily="2" charset="-78"/>
                 <a:cs typeface="Amiri" pitchFamily="2" charset="-78"/>
               </a:rPr>
               <a:t>مُدَرِّسُونَ</a:t>
@@ -6700,6 +6748,7 @@
                   <a:srgbClr val="1F2A37"/>
                 </a:solidFill>
                 <a:latin typeface="Amiri" pitchFamily="2" charset="-78"/>
+                <a:ea typeface="Amiri" pitchFamily="2" charset="-78"/>
                 <a:cs typeface="Amiri" pitchFamily="2" charset="-78"/>
               </a:rPr>
               <a:t>مَدَارِسُ</a:t>
@@ -6801,6 +6850,7 @@
                   <a:srgbClr val="1F2A37"/>
                 </a:solidFill>
                 <a:latin typeface="Amiri" pitchFamily="2" charset="-78"/>
+                <a:ea typeface="Amiri" pitchFamily="2" charset="-78"/>
                 <a:cs typeface="Amiri" pitchFamily="2" charset="-78"/>
               </a:rPr>
               <a:t>مُدَرِّسَاتٌ</a:t>
@@ -7037,6 +7087,7 @@
                   <a:srgbClr val="1F2A37"/>
                 </a:solidFill>
                 <a:latin typeface="Amiri" pitchFamily="2" charset="-78"/>
+                <a:ea typeface="Amiri" pitchFamily="2" charset="-78"/>
                 <a:cs typeface="Amiri" pitchFamily="2" charset="-78"/>
               </a:rPr>
               <a:t>ـاتُ</a:t>
@@ -7138,6 +7189,7 @@
                   <a:srgbClr val="1F2A37"/>
                 </a:solidFill>
                 <a:latin typeface="Amiri" pitchFamily="2" charset="-78"/>
+                <a:ea typeface="Amiri" pitchFamily="2" charset="-78"/>
                 <a:cs typeface="Amiri" pitchFamily="2" charset="-78"/>
               </a:rPr>
               <a:t>ـاتِ</a:t>
@@ -7239,6 +7291,7 @@
                   <a:srgbClr val="1F2A37"/>
                 </a:solidFill>
                 <a:latin typeface="Amiri" pitchFamily="2" charset="-78"/>
+                <a:ea typeface="Amiri" pitchFamily="2" charset="-78"/>
                 <a:cs typeface="Amiri" pitchFamily="2" charset="-78"/>
               </a:rPr>
               <a:t>ـاتَ</a:t>
@@ -7475,6 +7528,7 @@
                   <a:srgbClr val="1F2A37"/>
                 </a:solidFill>
                 <a:latin typeface="Amiri" pitchFamily="2" charset="-78"/>
+                <a:ea typeface="Amiri" pitchFamily="2" charset="-78"/>
                 <a:cs typeface="Amiri" pitchFamily="2" charset="-78"/>
               </a:rPr>
               <a:t>ـاتُ</a:t>
@@ -7576,6 +7630,7 @@
                   <a:srgbClr val="1F2A37"/>
                 </a:solidFill>
                 <a:latin typeface="Amiri" pitchFamily="2" charset="-78"/>
+                <a:ea typeface="Amiri" pitchFamily="2" charset="-78"/>
                 <a:cs typeface="Amiri" pitchFamily="2" charset="-78"/>
               </a:rPr>
               <a:t>ـاتِ</a:t>
@@ -7677,6 +7732,7 @@
                   <a:srgbClr val="1F2A37"/>
                 </a:solidFill>
                 <a:latin typeface="Amiri" pitchFamily="2" charset="-78"/>
+                <a:ea typeface="Amiri" pitchFamily="2" charset="-78"/>
                 <a:cs typeface="Amiri" pitchFamily="2" charset="-78"/>
               </a:rPr>
               <a:t>ـاتَ</a:t>
@@ -7825,6 +7881,7 @@
                   <a:srgbClr val="1B3B6F"/>
                 </a:solidFill>
                 <a:latin typeface="Amiri" pitchFamily="2" charset="-78"/>
+                <a:ea typeface="Amiri" pitchFamily="2" charset="-78"/>
                 <a:cs typeface="Amiri" pitchFamily="2" charset="-78"/>
               </a:rPr>
               <a:t>فِي</a:t>
@@ -7939,6 +7996,7 @@
                   <a:srgbClr val="1F2A37"/>
                 </a:solidFill>
                 <a:latin typeface="Amiri" pitchFamily="2" charset="-78"/>
+                <a:ea typeface="Amiri" pitchFamily="2" charset="-78"/>
                 <a:cs typeface="Amiri" pitchFamily="2" charset="-78"/>
               </a:rPr>
               <a:t>الْجَامِعَاتِ</a:t>
@@ -8040,6 +8098,7 @@
                   <a:srgbClr val="1F2A37"/>
                 </a:solidFill>
                 <a:latin typeface="Amiri" pitchFamily="2" charset="-78"/>
+                <a:ea typeface="Amiri" pitchFamily="2" charset="-78"/>
                 <a:cs typeface="Amiri" pitchFamily="2" charset="-78"/>
               </a:rPr>
               <a:t>الْجَامِعَاتُ</a:t>
@@ -8141,6 +8200,7 @@
                   <a:srgbClr val="1F2A37"/>
                 </a:solidFill>
                 <a:latin typeface="Amiri" pitchFamily="2" charset="-78"/>
+                <a:ea typeface="Amiri" pitchFamily="2" charset="-78"/>
                 <a:cs typeface="Amiri" pitchFamily="2" charset="-78"/>
               </a:rPr>
               <a:t>الْجَامِعَاتَ</a:t>
@@ -8274,6 +8334,7 @@
                   <a:srgbClr val="D4AF37"/>
                 </a:solidFill>
                 <a:latin typeface="Amiri" pitchFamily="2" charset="-78"/>
+                <a:ea typeface="Amiri" pitchFamily="2" charset="-78"/>
                 <a:cs typeface="Amiri" pitchFamily="2" charset="-78"/>
               </a:rPr>
               <a:t>م</a:t>
@@ -8594,6 +8655,7 @@
                   <a:srgbClr val="8A6D1E"/>
                 </a:solidFill>
                 <a:latin typeface="Amiri" pitchFamily="2" charset="-78"/>
+                <a:ea typeface="Amiri" pitchFamily="2" charset="-78"/>
                 <a:cs typeface="Amiri" pitchFamily="2" charset="-78"/>
               </a:rPr>
               <a:t>الإِجَابَاتُ وَالتَّعْلِيلُ</a:t>
@@ -8780,6 +8842,7 @@
                   <a:srgbClr val="1B3B6F"/>
                 </a:solidFill>
                 <a:latin typeface="Amiri" pitchFamily="2" charset="-78"/>
+                <a:ea typeface="Amiri" pitchFamily="2" charset="-78"/>
                 <a:cs typeface="Amiri" pitchFamily="2" charset="-78"/>
               </a:rPr>
               <a:t>مُدَرِّسَةٌ</a:t>
@@ -8894,6 +8957,7 @@
                   <a:srgbClr val="9AA1AB"/>
                 </a:solidFill>
                 <a:latin typeface="Amiri" pitchFamily="2" charset="-78"/>
+                <a:ea typeface="Amiri" pitchFamily="2" charset="-78"/>
                 <a:cs typeface="Amiri" pitchFamily="2" charset="-78"/>
               </a:rPr>
               <a:t>مُدَرِّسُونَ</a:t>
@@ -8995,6 +9059,7 @@
                   <a:srgbClr val="9AA1AB"/>
                 </a:solidFill>
                 <a:latin typeface="Amiri" pitchFamily="2" charset="-78"/>
+                <a:ea typeface="Amiri" pitchFamily="2" charset="-78"/>
                 <a:cs typeface="Amiri" pitchFamily="2" charset="-78"/>
               </a:rPr>
               <a:t>مَدَارِسُ</a:t>
@@ -9123,6 +9188,7 @@
                   <a:srgbClr val="1F2A37"/>
                 </a:solidFill>
                 <a:latin typeface="Amiri" pitchFamily="2" charset="-78"/>
+                <a:ea typeface="Amiri" pitchFamily="2" charset="-78"/>
                 <a:cs typeface="Amiri" pitchFamily="2" charset="-78"/>
               </a:rPr>
               <a:t>مُدَرِّسَاتٌ</a:t>
@@ -9424,6 +9490,7 @@
                   <a:srgbClr val="1F2A37"/>
                 </a:solidFill>
                 <a:latin typeface="Amiri" pitchFamily="2" charset="-78"/>
+                <a:ea typeface="Amiri" pitchFamily="2" charset="-78"/>
                 <a:cs typeface="Amiri" pitchFamily="2" charset="-78"/>
               </a:rPr>
               <a:t>ـاتُ</a:t>
@@ -9525,6 +9592,7 @@
                   <a:srgbClr val="9AA1AB"/>
                 </a:solidFill>
                 <a:latin typeface="Amiri" pitchFamily="2" charset="-78"/>
+                <a:ea typeface="Amiri" pitchFamily="2" charset="-78"/>
                 <a:cs typeface="Amiri" pitchFamily="2" charset="-78"/>
               </a:rPr>
               <a:t>ـاتِ</a:t>
@@ -9626,6 +9694,7 @@
                   <a:srgbClr val="9AA1AB"/>
                 </a:solidFill>
                 <a:latin typeface="Amiri" pitchFamily="2" charset="-78"/>
+                <a:ea typeface="Amiri" pitchFamily="2" charset="-78"/>
                 <a:cs typeface="Amiri" pitchFamily="2" charset="-78"/>
               </a:rPr>
               <a:t>ـاتَ</a:t>
@@ -9900,6 +9969,7 @@
                   <a:srgbClr val="9AA1AB"/>
                 </a:solidFill>
                 <a:latin typeface="Amiri" pitchFamily="2" charset="-78"/>
+                <a:ea typeface="Amiri" pitchFamily="2" charset="-78"/>
                 <a:cs typeface="Amiri" pitchFamily="2" charset="-78"/>
               </a:rPr>
               <a:t>ـاتُ</a:t>
@@ -10028,6 +10098,7 @@
                   <a:srgbClr val="1F2A37"/>
                 </a:solidFill>
                 <a:latin typeface="Amiri" pitchFamily="2" charset="-78"/>
+                <a:ea typeface="Amiri" pitchFamily="2" charset="-78"/>
                 <a:cs typeface="Amiri" pitchFamily="2" charset="-78"/>
               </a:rPr>
               <a:t>ـاتِ</a:t>
@@ -10129,6 +10200,7 @@
                   <a:srgbClr val="9AA1AB"/>
                 </a:solidFill>
                 <a:latin typeface="Amiri" pitchFamily="2" charset="-78"/>
+                <a:ea typeface="Amiri" pitchFamily="2" charset="-78"/>
                 <a:cs typeface="Amiri" pitchFamily="2" charset="-78"/>
               </a:rPr>
               <a:t>ـاتَ</a:t>
@@ -10315,6 +10387,7 @@
                   <a:srgbClr val="1B3B6F"/>
                 </a:solidFill>
                 <a:latin typeface="Amiri" pitchFamily="2" charset="-78"/>
+                <a:ea typeface="Amiri" pitchFamily="2" charset="-78"/>
                 <a:cs typeface="Amiri" pitchFamily="2" charset="-78"/>
               </a:rPr>
               <a:t>فِي</a:t>
@@ -10456,6 +10529,7 @@
                   <a:srgbClr val="1F2A37"/>
                 </a:solidFill>
                 <a:latin typeface="Amiri" pitchFamily="2" charset="-78"/>
+                <a:ea typeface="Amiri" pitchFamily="2" charset="-78"/>
                 <a:cs typeface="Amiri" pitchFamily="2" charset="-78"/>
               </a:rPr>
               <a:t>الْجَامِعَاتِ</a:t>
@@ -10557,6 +10631,7 @@
                   <a:srgbClr val="9AA1AB"/>
                 </a:solidFill>
                 <a:latin typeface="Amiri" pitchFamily="2" charset="-78"/>
+                <a:ea typeface="Amiri" pitchFamily="2" charset="-78"/>
                 <a:cs typeface="Amiri" pitchFamily="2" charset="-78"/>
               </a:rPr>
               <a:t>الْجَامِعَاتُ</a:t>
@@ -10658,6 +10733,7 @@
                   <a:srgbClr val="9AA1AB"/>
                 </a:solidFill>
                 <a:latin typeface="Amiri" pitchFamily="2" charset="-78"/>
+                <a:ea typeface="Amiri" pitchFamily="2" charset="-78"/>
                 <a:cs typeface="Amiri" pitchFamily="2" charset="-78"/>
               </a:rPr>
               <a:t>الْجَامِعَاتَ</a:t>
@@ -10829,6 +10905,7 @@
                   <a:srgbClr val="D4AF37"/>
                 </a:solidFill>
                 <a:latin typeface="Amiri" pitchFamily="2" charset="-78"/>
+                <a:ea typeface="Amiri" pitchFamily="2" charset="-78"/>
                 <a:cs typeface="Amiri" pitchFamily="2" charset="-78"/>
               </a:rPr>
               <a:t>م</a:t>
@@ -11149,6 +11226,7 @@
                   <a:srgbClr val="8A6D1E"/>
                 </a:solidFill>
                 <a:latin typeface="Amiri" pitchFamily="2" charset="-78"/>
+                <a:ea typeface="Amiri" pitchFamily="2" charset="-78"/>
                 <a:cs typeface="Amiri" pitchFamily="2" charset="-78"/>
               </a:rPr>
               <a:t>شَاهِدْ ثُمَّ اُكْتُبْ</a:t>
@@ -11360,6 +11438,7 @@
                   <a:srgbClr val="1B3B6F"/>
                 </a:solidFill>
                 <a:latin typeface="Amiri" pitchFamily="2" charset="-78"/>
+                <a:ea typeface="Amiri" pitchFamily="2" charset="-78"/>
                 <a:cs typeface="Amiri" pitchFamily="2" charset="-78"/>
               </a:rPr>
               <a:t>مُعَلِّمَةٌ</a:t>
@@ -11609,6 +11688,7 @@
                   <a:srgbClr val="1B3B6F"/>
                 </a:solidFill>
                 <a:latin typeface="Amiri" pitchFamily="2" charset="-78"/>
+                <a:ea typeface="Amiri" pitchFamily="2" charset="-78"/>
                 <a:cs typeface="Amiri" pitchFamily="2" charset="-78"/>
               </a:rPr>
               <a:t>مُعَلِّمَاتٌ</a:t>
@@ -11858,6 +11938,7 @@
                   <a:srgbClr val="1B3B6F"/>
                 </a:solidFill>
                 <a:latin typeface="Amiri" pitchFamily="2" charset="-78"/>
+                <a:ea typeface="Amiri" pitchFamily="2" charset="-78"/>
                 <a:cs typeface="Amiri" pitchFamily="2" charset="-78"/>
               </a:rPr>
               <a:t>حَضَرَتِ الْمُعَلِّمَاتُ</a:t>
@@ -12107,6 +12188,7 @@
                   <a:srgbClr val="1B3B6F"/>
                 </a:solidFill>
                 <a:latin typeface="Amiri" pitchFamily="2" charset="-78"/>
+                <a:ea typeface="Amiri" pitchFamily="2" charset="-78"/>
                 <a:cs typeface="Amiri" pitchFamily="2" charset="-78"/>
               </a:rPr>
               <a:t>شَكَرْتُ الْمُعَلِّمَاتِ</a:t>
@@ -12409,6 +12491,7 @@
                   <a:srgbClr val="1B3B6F"/>
                 </a:solidFill>
                 <a:latin typeface="Amiri" pitchFamily="2" charset="-78"/>
+                <a:ea typeface="Amiri" pitchFamily="2" charset="-78"/>
                 <a:cs typeface="Amiri" pitchFamily="2" charset="-78"/>
               </a:rPr>
               <a:t>حَضَرَتِ </a:t>
@@ -12422,6 +12505,7 @@
                   <a:srgbClr val="0E7C86"/>
                 </a:solidFill>
                 <a:latin typeface="Amiri" pitchFamily="2" charset="-78"/>
+                <a:ea typeface="Amiri" pitchFamily="2" charset="-78"/>
                 <a:cs typeface="Amiri" pitchFamily="2" charset="-78"/>
               </a:rPr>
               <a:t>الْمُعَلِّمَاتُ</a:t>
@@ -12435,6 +12519,7 @@
                   <a:srgbClr val="1B3B6F"/>
                 </a:solidFill>
                 <a:latin typeface="Amiri" pitchFamily="2" charset="-78"/>
+                <a:ea typeface="Amiri" pitchFamily="2" charset="-78"/>
                 <a:cs typeface="Amiri" pitchFamily="2" charset="-78"/>
               </a:rPr>
               <a:t> مُبَكِّرًا، وَشَكَرْتُ </a:t>
@@ -12448,6 +12533,7 @@
                   <a:srgbClr val="D6336C"/>
                 </a:solidFill>
                 <a:latin typeface="Amiri" pitchFamily="2" charset="-78"/>
+                <a:ea typeface="Amiri" pitchFamily="2" charset="-78"/>
                 <a:cs typeface="Amiri" pitchFamily="2" charset="-78"/>
               </a:rPr>
               <a:t>الْمُعَلِّمَاتِ</a:t>
@@ -12461,6 +12547,7 @@
                   <a:srgbClr val="1B3B6F"/>
                 </a:solidFill>
                 <a:latin typeface="Amiri" pitchFamily="2" charset="-78"/>
+                <a:ea typeface="Amiri" pitchFamily="2" charset="-78"/>
                 <a:cs typeface="Amiri" pitchFamily="2" charset="-78"/>
               </a:rPr>
               <a:t> بَعْدَ الدَّرْسِ. الْمُعَلِّمَاتُ خَبِيرَاتٌ.</a:t>
@@ -12632,6 +12719,7 @@
                   <a:srgbClr val="D4AF37"/>
                 </a:solidFill>
                 <a:latin typeface="Amiri" pitchFamily="2" charset="-78"/>
+                <a:ea typeface="Amiri" pitchFamily="2" charset="-78"/>
                 <a:cs typeface="Amiri" pitchFamily="2" charset="-78"/>
               </a:rPr>
               <a:t>م</a:t>
@@ -12952,6 +13040,7 @@
                   <a:srgbClr val="8A6D1E"/>
                 </a:solidFill>
                 <a:latin typeface="Amiri" pitchFamily="2" charset="-78"/>
+                <a:ea typeface="Amiri" pitchFamily="2" charset="-78"/>
                 <a:cs typeface="Amiri" pitchFamily="2" charset="-78"/>
               </a:rPr>
               <a:t>جُمَلٌ نَمُوذَجِيَّةٌ</a:t>
@@ -13125,6 +13214,7 @@
                   <a:srgbClr val="1B3B6F"/>
                 </a:solidFill>
                 <a:latin typeface="Amiri" pitchFamily="2" charset="-78"/>
+                <a:ea typeface="Amiri" pitchFamily="2" charset="-78"/>
                 <a:cs typeface="Amiri" pitchFamily="2" charset="-78"/>
               </a:rPr>
               <a:t>فِي مَدْرَسَتِنَا مُعَلِّمَاتٌ خَبِيرَاتٌ.</a:t>
@@ -13314,6 +13404,7 @@
                   <a:srgbClr val="1B3B6F"/>
                 </a:solidFill>
                 <a:latin typeface="Amiri" pitchFamily="2" charset="-78"/>
+                <a:ea typeface="Amiri" pitchFamily="2" charset="-78"/>
                 <a:cs typeface="Amiri" pitchFamily="2" charset="-78"/>
               </a:rPr>
               <a:t>رَأَيْتُ الطَّالِبَاتِ فِي الْمَكْتَبَةِ.</a:t>
@@ -13503,6 +13594,7 @@
                   <a:srgbClr val="1B3B6F"/>
                 </a:solidFill>
                 <a:latin typeface="Amiri" pitchFamily="2" charset="-78"/>
+                <a:ea typeface="Amiri" pitchFamily="2" charset="-78"/>
                 <a:cs typeface="Amiri" pitchFamily="2" charset="-78"/>
               </a:rPr>
               <a:t>السَّيَّارَاتُ فِي الشَّارِعِ كَثِيرَةٌ.</a:t>
@@ -13692,6 +13784,7 @@
                   <a:srgbClr val="1B3B6F"/>
                 </a:solidFill>
                 <a:latin typeface="Amiri" pitchFamily="2" charset="-78"/>
+                <a:ea typeface="Amiri" pitchFamily="2" charset="-78"/>
                 <a:cs typeface="Amiri" pitchFamily="2" charset="-78"/>
               </a:rPr>
               <a:t>دَرَسَ أَخِي فِي جَامِعَاتٍ مُخْتَلِفَةٍ.</a:t>
@@ -13879,6 +13972,7 @@
                   <a:srgbClr val="D4AF37"/>
                 </a:solidFill>
                 <a:latin typeface="Amiri" pitchFamily="2" charset="-78"/>
+                <a:ea typeface="Amiri" pitchFamily="2" charset="-78"/>
                 <a:cs typeface="Amiri" pitchFamily="2" charset="-78"/>
               </a:rPr>
               <a:t>م</a:t>
@@ -14199,6 +14293,7 @@
                   <a:srgbClr val="8A6D1E"/>
                 </a:solidFill>
                 <a:latin typeface="Amiri" pitchFamily="2" charset="-78"/>
+                <a:ea typeface="Amiri" pitchFamily="2" charset="-78"/>
                 <a:cs typeface="Amiri" pitchFamily="2" charset="-78"/>
               </a:rPr>
               <a:t>صَنِّفْ</a:t>
@@ -14309,6 +14404,7 @@
                   <a:srgbClr val="1B3B6F"/>
                 </a:solidFill>
                 <a:latin typeface="Amiri" pitchFamily="2" charset="-78"/>
+                <a:ea typeface="Amiri" pitchFamily="2" charset="-78"/>
                 <a:cs typeface="Amiri" pitchFamily="2" charset="-78"/>
               </a:rPr>
               <a:t>طَالِبَةٌ · طَالِبَاتٌ</a:t>
@@ -14381,6 +14477,7 @@
                   <a:srgbClr val="1B3B6F"/>
                 </a:solidFill>
                 <a:latin typeface="Amiri" pitchFamily="2" charset="-78"/>
+                <a:ea typeface="Amiri" pitchFamily="2" charset="-78"/>
                 <a:cs typeface="Amiri" pitchFamily="2" charset="-78"/>
               </a:rPr>
               <a:t>مَدْرَسَةٌ · مَدَارِسُ</a:t>
@@ -14453,6 +14550,7 @@
                   <a:srgbClr val="1B3B6F"/>
                 </a:solidFill>
                 <a:latin typeface="Amiri" pitchFamily="2" charset="-78"/>
+                <a:ea typeface="Amiri" pitchFamily="2" charset="-78"/>
                 <a:cs typeface="Amiri" pitchFamily="2" charset="-78"/>
               </a:rPr>
               <a:t>سَيَّارَةٌ · سَيَّارَاتٌ</a:t>
@@ -14525,6 +14623,7 @@
                   <a:srgbClr val="1B3B6F"/>
                 </a:solidFill>
                 <a:latin typeface="Amiri" pitchFamily="2" charset="-78"/>
+                <a:ea typeface="Amiri" pitchFamily="2" charset="-78"/>
                 <a:cs typeface="Amiri" pitchFamily="2" charset="-78"/>
               </a:rPr>
               <a:t>مَدِينَةٌ · مُدُنٌ</a:t>
@@ -14597,6 +14696,7 @@
                   <a:srgbClr val="1B3B6F"/>
                 </a:solidFill>
                 <a:latin typeface="Amiri" pitchFamily="2" charset="-78"/>
+                <a:ea typeface="Amiri" pitchFamily="2" charset="-78"/>
                 <a:cs typeface="Amiri" pitchFamily="2" charset="-78"/>
               </a:rPr>
               <a:t>جَامِعَةٌ · جَامِعَاتٌ</a:t>
@@ -14669,6 +14769,7 @@
                   <a:srgbClr val="1B3B6F"/>
                 </a:solidFill>
                 <a:latin typeface="Amiri" pitchFamily="2" charset="-78"/>
+                <a:ea typeface="Amiri" pitchFamily="2" charset="-78"/>
                 <a:cs typeface="Amiri" pitchFamily="2" charset="-78"/>
               </a:rPr>
               <a:t>غُرْفَةٌ · غُرَفٌ</a:t>
@@ -14741,6 +14842,7 @@
                   <a:srgbClr val="1B3B6F"/>
                 </a:solidFill>
                 <a:latin typeface="Amiri" pitchFamily="2" charset="-78"/>
+                <a:ea typeface="Amiri" pitchFamily="2" charset="-78"/>
                 <a:cs typeface="Amiri" pitchFamily="2" charset="-78"/>
               </a:rPr>
               <a:t>مُعَلِّمَةٌ · مُعَلِّمَاتٌ</a:t>
@@ -14813,6 +14915,7 @@
                   <a:srgbClr val="1B3B6F"/>
                 </a:solidFill>
                 <a:latin typeface="Amiri" pitchFamily="2" charset="-78"/>
+                <a:ea typeface="Amiri" pitchFamily="2" charset="-78"/>
                 <a:cs typeface="Amiri" pitchFamily="2" charset="-78"/>
               </a:rPr>
               <a:t>حَدِيقَةٌ · حَدَائِقُ</a:t>
@@ -15130,6 +15233,7 @@
                   <a:srgbClr val="D4AF37"/>
                 </a:solidFill>
                 <a:latin typeface="Amiri" pitchFamily="2" charset="-78"/>
+                <a:ea typeface="Amiri" pitchFamily="2" charset="-78"/>
                 <a:cs typeface="Amiri" pitchFamily="2" charset="-78"/>
               </a:rPr>
               <a:t>م</a:t>
@@ -15450,6 +15554,7 @@
                   <a:srgbClr val="8A6D1E"/>
                 </a:solidFill>
                 <a:latin typeface="Amiri" pitchFamily="2" charset="-78"/>
+                <a:ea typeface="Amiri" pitchFamily="2" charset="-78"/>
                 <a:cs typeface="Amiri" pitchFamily="2" charset="-78"/>
               </a:rPr>
               <a:t>الإِجَابَاتُ</a:t>
@@ -15645,6 +15750,7 @@
                   <a:srgbClr val="1B3B6F"/>
                 </a:solidFill>
                 <a:latin typeface="Amiri" pitchFamily="2" charset="-78"/>
+                <a:ea typeface="Amiri" pitchFamily="2" charset="-78"/>
                 <a:cs typeface="Amiri" pitchFamily="2" charset="-78"/>
               </a:rPr>
               <a:t>طَالِبَةٌ · طَالِبَاتٌ</a:t>
@@ -15710,6 +15816,7 @@
                   <a:srgbClr val="1B3B6F"/>
                 </a:solidFill>
                 <a:latin typeface="Amiri" pitchFamily="2" charset="-78"/>
+                <a:ea typeface="Amiri" pitchFamily="2" charset="-78"/>
                 <a:cs typeface="Amiri" pitchFamily="2" charset="-78"/>
               </a:rPr>
               <a:t>سَيَّارَةٌ · سَيَّارَاتٌ</a:t>
@@ -15775,6 +15882,7 @@
                   <a:srgbClr val="1B3B6F"/>
                 </a:solidFill>
                 <a:latin typeface="Amiri" pitchFamily="2" charset="-78"/>
+                <a:ea typeface="Amiri" pitchFamily="2" charset="-78"/>
                 <a:cs typeface="Amiri" pitchFamily="2" charset="-78"/>
               </a:rPr>
               <a:t>جَامِعَةٌ · جَامِعَاتٌ</a:t>
@@ -15840,6 +15948,7 @@
                   <a:srgbClr val="1B3B6F"/>
                 </a:solidFill>
                 <a:latin typeface="Amiri" pitchFamily="2" charset="-78"/>
+                <a:ea typeface="Amiri" pitchFamily="2" charset="-78"/>
                 <a:cs typeface="Amiri" pitchFamily="2" charset="-78"/>
               </a:rPr>
               <a:t>مُعَلِّمَةٌ · مُعَلِّمَاتٌ</a:t>
@@ -15997,6 +16106,7 @@
                   <a:srgbClr val="1B3B6F"/>
                 </a:solidFill>
                 <a:latin typeface="Amiri" pitchFamily="2" charset="-78"/>
+                <a:ea typeface="Amiri" pitchFamily="2" charset="-78"/>
                 <a:cs typeface="Amiri" pitchFamily="2" charset="-78"/>
               </a:rPr>
               <a:t>مَدْرَسَةٌ · مَدَارِسُ</a:t>
@@ -16062,6 +16172,7 @@
                   <a:srgbClr val="1B3B6F"/>
                 </a:solidFill>
                 <a:latin typeface="Amiri" pitchFamily="2" charset="-78"/>
+                <a:ea typeface="Amiri" pitchFamily="2" charset="-78"/>
                 <a:cs typeface="Amiri" pitchFamily="2" charset="-78"/>
               </a:rPr>
               <a:t>مَدِينَةٌ · مُدُنٌ</a:t>
@@ -16127,6 +16238,7 @@
                   <a:srgbClr val="1B3B6F"/>
                 </a:solidFill>
                 <a:latin typeface="Amiri" pitchFamily="2" charset="-78"/>
+                <a:ea typeface="Amiri" pitchFamily="2" charset="-78"/>
                 <a:cs typeface="Amiri" pitchFamily="2" charset="-78"/>
               </a:rPr>
               <a:t>غُرْفَةٌ · غُرَفٌ</a:t>
@@ -16192,6 +16304,7 @@
                   <a:srgbClr val="1B3B6F"/>
                 </a:solidFill>
                 <a:latin typeface="Amiri" pitchFamily="2" charset="-78"/>
+                <a:ea typeface="Amiri" pitchFamily="2" charset="-78"/>
                 <a:cs typeface="Amiri" pitchFamily="2" charset="-78"/>
               </a:rPr>
               <a:t>حَدِيقَةٌ · حَدَائِقُ</a:t>
@@ -16325,6 +16438,7 @@
                   <a:srgbClr val="D4AF37"/>
                 </a:solidFill>
                 <a:latin typeface="Amiri" pitchFamily="2" charset="-78"/>
+                <a:ea typeface="Amiri" pitchFamily="2" charset="-78"/>
                 <a:cs typeface="Amiri" pitchFamily="2" charset="-78"/>
               </a:rPr>
               <a:t>م</a:t>
@@ -16645,6 +16759,7 @@
                   <a:srgbClr val="8A6D1E"/>
                 </a:solidFill>
                 <a:latin typeface="Amiri" pitchFamily="2" charset="-78"/>
+                <a:ea typeface="Amiri" pitchFamily="2" charset="-78"/>
                 <a:cs typeface="Amiri" pitchFamily="2" charset="-78"/>
               </a:rPr>
               <a:t>صَحِّحِ الخَطَأَ</a:t>
@@ -16818,6 +16933,7 @@
                   <a:srgbClr val="B83227"/>
                 </a:solidFill>
                 <a:latin typeface="Amiri" pitchFamily="2" charset="-78"/>
+                <a:ea typeface="Amiri" pitchFamily="2" charset="-78"/>
                 <a:cs typeface="Amiri" pitchFamily="2" charset="-78"/>
               </a:rPr>
               <a:t>رَأَيْتُ الطَّالِبَاتَ.</a:t>
@@ -16991,6 +17107,7 @@
                   <a:srgbClr val="B83227"/>
                 </a:solidFill>
                 <a:latin typeface="Amiri" pitchFamily="2" charset="-78"/>
+                <a:ea typeface="Amiri" pitchFamily="2" charset="-78"/>
                 <a:cs typeface="Amiri" pitchFamily="2" charset="-78"/>
               </a:rPr>
               <a:t>مَدْرَسَاتٌ</a:t>
@@ -17164,6 +17281,7 @@
                   <a:srgbClr val="B83227"/>
                 </a:solidFill>
                 <a:latin typeface="Amiri" pitchFamily="2" charset="-78"/>
+                <a:ea typeface="Amiri" pitchFamily="2" charset="-78"/>
                 <a:cs typeface="Amiri" pitchFamily="2" charset="-78"/>
               </a:rPr>
               <a:t>الطَّالِبَاتُ مُجْتَهِدَةٌ.</a:t>
@@ -17335,6 +17453,7 @@
                   <a:srgbClr val="D4AF37"/>
                 </a:solidFill>
                 <a:latin typeface="Amiri" pitchFamily="2" charset="-78"/>
+                <a:ea typeface="Amiri" pitchFamily="2" charset="-78"/>
                 <a:cs typeface="Amiri" pitchFamily="2" charset="-78"/>
               </a:rPr>
               <a:t>م</a:t>
@@ -17655,6 +17774,7 @@
                   <a:srgbClr val="8A6D1E"/>
                 </a:solidFill>
                 <a:latin typeface="Amiri" pitchFamily="2" charset="-78"/>
+                <a:ea typeface="Amiri" pitchFamily="2" charset="-78"/>
                 <a:cs typeface="Amiri" pitchFamily="2" charset="-78"/>
               </a:rPr>
               <a:t>التَّصْحِيحُ وَالسَّبَبُ</a:t>
@@ -17765,6 +17885,7 @@
                   <a:srgbClr val="B83227"/>
                 </a:solidFill>
                 <a:latin typeface="Amiri" pitchFamily="2" charset="-78"/>
+                <a:ea typeface="Amiri" pitchFamily="2" charset="-78"/>
                 <a:cs typeface="Amiri" pitchFamily="2" charset="-78"/>
               </a:rPr>
               <a:t>رَأَيْتُ الطَّالِبَاتَ.</a:t>
@@ -17864,6 +17985,7 @@
                   <a:srgbClr val="1E6B52"/>
                 </a:solidFill>
                 <a:latin typeface="Amiri" pitchFamily="2" charset="-78"/>
+                <a:ea typeface="Amiri" pitchFamily="2" charset="-78"/>
                 <a:cs typeface="Amiri" pitchFamily="2" charset="-78"/>
               </a:rPr>
               <a:t>رَأَيْتُ الطَّالِبَاتِ.</a:t>
@@ -17974,6 +18096,7 @@
                   <a:srgbClr val="B83227"/>
                 </a:solidFill>
                 <a:latin typeface="Amiri" pitchFamily="2" charset="-78"/>
+                <a:ea typeface="Amiri" pitchFamily="2" charset="-78"/>
                 <a:cs typeface="Amiri" pitchFamily="2" charset="-78"/>
               </a:rPr>
               <a:t>مَدْرَسَاتٌ</a:t>
@@ -18073,6 +18196,7 @@
                   <a:srgbClr val="1E6B52"/>
                 </a:solidFill>
                 <a:latin typeface="Amiri" pitchFamily="2" charset="-78"/>
+                <a:ea typeface="Amiri" pitchFamily="2" charset="-78"/>
                 <a:cs typeface="Amiri" pitchFamily="2" charset="-78"/>
               </a:rPr>
               <a:t>مَدَارِسُ</a:t>
@@ -18183,6 +18307,7 @@
                   <a:srgbClr val="B83227"/>
                 </a:solidFill>
                 <a:latin typeface="Amiri" pitchFamily="2" charset="-78"/>
+                <a:ea typeface="Amiri" pitchFamily="2" charset="-78"/>
                 <a:cs typeface="Amiri" pitchFamily="2" charset="-78"/>
               </a:rPr>
               <a:t>الطَّالِبَاتُ مُجْتَهِدَةٌ.</a:t>
@@ -18282,6 +18407,7 @@
                   <a:srgbClr val="1E6B52"/>
                 </a:solidFill>
                 <a:latin typeface="Amiri" pitchFamily="2" charset="-78"/>
+                <a:ea typeface="Amiri" pitchFamily="2" charset="-78"/>
                 <a:cs typeface="Amiri" pitchFamily="2" charset="-78"/>
               </a:rPr>
               <a:t>الطَّالِبَاتُ مُجْتَهِدَاتٌ.</a:t>
@@ -18453,6 +18579,7 @@
                   <a:srgbClr val="D4AF37"/>
                 </a:solidFill>
                 <a:latin typeface="Amiri" pitchFamily="2" charset="-78"/>
+                <a:ea typeface="Amiri" pitchFamily="2" charset="-78"/>
                 <a:cs typeface="Amiri" pitchFamily="2" charset="-78"/>
               </a:rPr>
               <a:t>م</a:t>
@@ -18838,6 +18965,7 @@
                   <a:srgbClr val="8A6D1E"/>
                 </a:solidFill>
                 <a:latin typeface="Amiri" pitchFamily="2" charset="-78"/>
+                <a:ea typeface="Amiri" pitchFamily="2" charset="-78"/>
                 <a:cs typeface="Amiri" pitchFamily="2" charset="-78"/>
               </a:rPr>
               <a:t>تَدْرِيبٌ إِضَافِيٌّ</a:t>
@@ -19112,6 +19240,7 @@
                   <a:srgbClr val="1F2A37"/>
                 </a:solidFill>
                 <a:latin typeface="Amiri" pitchFamily="2" charset="-78"/>
+                <a:ea typeface="Amiri" pitchFamily="2" charset="-78"/>
                 <a:cs typeface="Amiri" pitchFamily="2" charset="-78"/>
               </a:rPr>
               <a:t>نَشِيطَةٌ</a:t>
@@ -19213,6 +19342,7 @@
                   <a:srgbClr val="1F2A37"/>
                 </a:solidFill>
                 <a:latin typeface="Amiri" pitchFamily="2" charset="-78"/>
+                <a:ea typeface="Amiri" pitchFamily="2" charset="-78"/>
                 <a:cs typeface="Amiri" pitchFamily="2" charset="-78"/>
               </a:rPr>
               <a:t>نَشِيطُونَ</a:t>
@@ -19314,6 +19444,7 @@
                   <a:srgbClr val="1F2A37"/>
                 </a:solidFill>
                 <a:latin typeface="Amiri" pitchFamily="2" charset="-78"/>
+                <a:ea typeface="Amiri" pitchFamily="2" charset="-78"/>
                 <a:cs typeface="Amiri" pitchFamily="2" charset="-78"/>
               </a:rPr>
               <a:t>نَشِيطَاتٌ</a:t>
@@ -19550,6 +19681,7 @@
                   <a:srgbClr val="1F2A37"/>
                 </a:solidFill>
                 <a:latin typeface="Amiri" pitchFamily="2" charset="-78"/>
+                <a:ea typeface="Amiri" pitchFamily="2" charset="-78"/>
                 <a:cs typeface="Amiri" pitchFamily="2" charset="-78"/>
               </a:rPr>
               <a:t>طَالِبَةٌ</a:t>
@@ -19651,6 +19783,7 @@
                   <a:srgbClr val="1F2A37"/>
                 </a:solidFill>
                 <a:latin typeface="Amiri" pitchFamily="2" charset="-78"/>
+                <a:ea typeface="Amiri" pitchFamily="2" charset="-78"/>
                 <a:cs typeface="Amiri" pitchFamily="2" charset="-78"/>
               </a:rPr>
               <a:t>مَدْرَسَةٌ</a:t>
@@ -19752,6 +19885,7 @@
                   <a:srgbClr val="1F2A37"/>
                 </a:solidFill>
                 <a:latin typeface="Amiri" pitchFamily="2" charset="-78"/>
+                <a:ea typeface="Amiri" pitchFamily="2" charset="-78"/>
                 <a:cs typeface="Amiri" pitchFamily="2" charset="-78"/>
               </a:rPr>
               <a:t>مُعَلِّمَةٌ</a:t>
@@ -19988,6 +20122,7 @@
                   <a:srgbClr val="1F2A37"/>
                 </a:solidFill>
                 <a:latin typeface="Amiri" pitchFamily="2" charset="-78"/>
+                <a:ea typeface="Amiri" pitchFamily="2" charset="-78"/>
                 <a:cs typeface="Amiri" pitchFamily="2" charset="-78"/>
               </a:rPr>
               <a:t>رَأَيْتُ الْمُعَلِّمَاتُ</a:t>
@@ -20089,6 +20224,7 @@
                   <a:srgbClr val="1F2A37"/>
                 </a:solidFill>
                 <a:latin typeface="Amiri" pitchFamily="2" charset="-78"/>
+                <a:ea typeface="Amiri" pitchFamily="2" charset="-78"/>
                 <a:cs typeface="Amiri" pitchFamily="2" charset="-78"/>
               </a:rPr>
               <a:t>رَأَيْتُ الْمُعَلِّمَاتِ</a:t>
@@ -20190,6 +20326,7 @@
                   <a:srgbClr val="1F2A37"/>
                 </a:solidFill>
                 <a:latin typeface="Amiri" pitchFamily="2" charset="-78"/>
+                <a:ea typeface="Amiri" pitchFamily="2" charset="-78"/>
                 <a:cs typeface="Amiri" pitchFamily="2" charset="-78"/>
               </a:rPr>
               <a:t>رَأَيْتُ الْمُعَلِّمَاتَ</a:t>
@@ -20426,6 +20563,7 @@
                   <a:srgbClr val="1F2A37"/>
                 </a:solidFill>
                 <a:latin typeface="Amiri" pitchFamily="2" charset="-78"/>
+                <a:ea typeface="Amiri" pitchFamily="2" charset="-78"/>
                 <a:cs typeface="Amiri" pitchFamily="2" charset="-78"/>
               </a:rPr>
               <a:t>طَالِبَاتٍ</a:t>
@@ -20527,6 +20665,7 @@
                   <a:srgbClr val="1F2A37"/>
                 </a:solidFill>
                 <a:latin typeface="Amiri" pitchFamily="2" charset="-78"/>
+                <a:ea typeface="Amiri" pitchFamily="2" charset="-78"/>
                 <a:cs typeface="Amiri" pitchFamily="2" charset="-78"/>
               </a:rPr>
               <a:t>الطَّالِبَاتُ</a:t>
@@ -20628,6 +20767,7 @@
                   <a:srgbClr val="1F2A37"/>
                 </a:solidFill>
                 <a:latin typeface="Amiri" pitchFamily="2" charset="-78"/>
+                <a:ea typeface="Amiri" pitchFamily="2" charset="-78"/>
                 <a:cs typeface="Amiri" pitchFamily="2" charset="-78"/>
               </a:rPr>
               <a:t>طَالِبَاتٌ</a:t>
@@ -20761,6 +20901,7 @@
                   <a:srgbClr val="D4AF37"/>
                 </a:solidFill>
                 <a:latin typeface="Amiri" pitchFamily="2" charset="-78"/>
+                <a:ea typeface="Amiri" pitchFamily="2" charset="-78"/>
                 <a:cs typeface="Amiri" pitchFamily="2" charset="-78"/>
               </a:rPr>
               <a:t>م</a:t>
@@ -21081,6 +21222,7 @@
                   <a:srgbClr val="8A6D1E"/>
                 </a:solidFill>
                 <a:latin typeface="Amiri" pitchFamily="2" charset="-78"/>
+                <a:ea typeface="Amiri" pitchFamily="2" charset="-78"/>
                 <a:cs typeface="Amiri" pitchFamily="2" charset="-78"/>
               </a:rPr>
               <a:t>آدَابُ الصَّفِّ</a:t>
@@ -22612,6 +22754,7 @@
                   <a:srgbClr val="D4AF37"/>
                 </a:solidFill>
                 <a:latin typeface="Amiri" pitchFamily="2" charset="-78"/>
+                <a:ea typeface="Amiri" pitchFamily="2" charset="-78"/>
                 <a:cs typeface="Amiri" pitchFamily="2" charset="-78"/>
               </a:rPr>
               <a:t>م</a:t>
@@ -22997,6 +23140,7 @@
                   <a:srgbClr val="8A6D1E"/>
                 </a:solidFill>
                 <a:latin typeface="Amiri" pitchFamily="2" charset="-78"/>
+                <a:ea typeface="Amiri" pitchFamily="2" charset="-78"/>
                 <a:cs typeface="Amiri" pitchFamily="2" charset="-78"/>
               </a:rPr>
               <a:t>الإِجَابَاتُ وَالتَّعْلِيلُ</a:t>
@@ -23271,6 +23415,7 @@
                   <a:srgbClr val="9AA1AB"/>
                 </a:solidFill>
                 <a:latin typeface="Amiri" pitchFamily="2" charset="-78"/>
+                <a:ea typeface="Amiri" pitchFamily="2" charset="-78"/>
                 <a:cs typeface="Amiri" pitchFamily="2" charset="-78"/>
               </a:rPr>
               <a:t>نَشِيطَةٌ</a:t>
@@ -23372,6 +23517,7 @@
                   <a:srgbClr val="9AA1AB"/>
                 </a:solidFill>
                 <a:latin typeface="Amiri" pitchFamily="2" charset="-78"/>
+                <a:ea typeface="Amiri" pitchFamily="2" charset="-78"/>
                 <a:cs typeface="Amiri" pitchFamily="2" charset="-78"/>
               </a:rPr>
               <a:t>نَشِيطُونَ</a:t>
@@ -23500,6 +23646,7 @@
                   <a:srgbClr val="1F2A37"/>
                 </a:solidFill>
                 <a:latin typeface="Amiri" pitchFamily="2" charset="-78"/>
+                <a:ea typeface="Amiri" pitchFamily="2" charset="-78"/>
                 <a:cs typeface="Amiri" pitchFamily="2" charset="-78"/>
               </a:rPr>
               <a:t>نَشِيطَاتٌ</a:t>
@@ -23774,6 +23921,7 @@
                   <a:srgbClr val="9AA1AB"/>
                 </a:solidFill>
                 <a:latin typeface="Amiri" pitchFamily="2" charset="-78"/>
+                <a:ea typeface="Amiri" pitchFamily="2" charset="-78"/>
                 <a:cs typeface="Amiri" pitchFamily="2" charset="-78"/>
               </a:rPr>
               <a:t>طَالِبَةٌ</a:t>
@@ -23902,6 +24050,7 @@
                   <a:srgbClr val="1F2A37"/>
                 </a:solidFill>
                 <a:latin typeface="Amiri" pitchFamily="2" charset="-78"/>
+                <a:ea typeface="Amiri" pitchFamily="2" charset="-78"/>
                 <a:cs typeface="Amiri" pitchFamily="2" charset="-78"/>
               </a:rPr>
               <a:t>مَدْرَسَةٌ</a:t>
@@ -24003,6 +24152,7 @@
                   <a:srgbClr val="9AA1AB"/>
                 </a:solidFill>
                 <a:latin typeface="Amiri" pitchFamily="2" charset="-78"/>
+                <a:ea typeface="Amiri" pitchFamily="2" charset="-78"/>
                 <a:cs typeface="Amiri" pitchFamily="2" charset="-78"/>
               </a:rPr>
               <a:t>مُعَلِّمَةٌ</a:t>
@@ -24041,6 +24191,7 @@
                   <a:srgbClr val="8A6D1E"/>
                 </a:solidFill>
                 <a:latin typeface="Amiri" pitchFamily="2" charset="-78"/>
+                <a:ea typeface="Amiri" pitchFamily="2" charset="-78"/>
                 <a:cs typeface="Amiri" pitchFamily="2" charset="-78"/>
               </a:rPr>
               <a:t>مدارس.</a:t>
@@ -24277,6 +24428,7 @@
                   <a:srgbClr val="9AA1AB"/>
                 </a:solidFill>
                 <a:latin typeface="Amiri" pitchFamily="2" charset="-78"/>
+                <a:ea typeface="Amiri" pitchFamily="2" charset="-78"/>
                 <a:cs typeface="Amiri" pitchFamily="2" charset="-78"/>
               </a:rPr>
               <a:t>رَأَيْتُ الْمُعَلِّمَاتُ</a:t>
@@ -24405,6 +24557,7 @@
                   <a:srgbClr val="1F2A37"/>
                 </a:solidFill>
                 <a:latin typeface="Amiri" pitchFamily="2" charset="-78"/>
+                <a:ea typeface="Amiri" pitchFamily="2" charset="-78"/>
                 <a:cs typeface="Amiri" pitchFamily="2" charset="-78"/>
               </a:rPr>
               <a:t>رَأَيْتُ الْمُعَلِّمَاتِ</a:t>
@@ -24506,6 +24659,7 @@
                   <a:srgbClr val="9AA1AB"/>
                 </a:solidFill>
                 <a:latin typeface="Amiri" pitchFamily="2" charset="-78"/>
+                <a:ea typeface="Amiri" pitchFamily="2" charset="-78"/>
                 <a:cs typeface="Amiri" pitchFamily="2" charset="-78"/>
               </a:rPr>
               <a:t>رَأَيْتُ الْمُعَلِّمَاتَ</a:t>
@@ -24780,6 +24934,7 @@
                   <a:srgbClr val="9AA1AB"/>
                 </a:solidFill>
                 <a:latin typeface="Amiri" pitchFamily="2" charset="-78"/>
+                <a:ea typeface="Amiri" pitchFamily="2" charset="-78"/>
                 <a:cs typeface="Amiri" pitchFamily="2" charset="-78"/>
               </a:rPr>
               <a:t>طَالِبَاتٍ</a:t>
@@ -24881,6 +25036,7 @@
                   <a:srgbClr val="9AA1AB"/>
                 </a:solidFill>
                 <a:latin typeface="Amiri" pitchFamily="2" charset="-78"/>
+                <a:ea typeface="Amiri" pitchFamily="2" charset="-78"/>
                 <a:cs typeface="Amiri" pitchFamily="2" charset="-78"/>
               </a:rPr>
               <a:t>الطَّالِبَاتُ</a:t>
@@ -25009,6 +25165,7 @@
                   <a:srgbClr val="1F2A37"/>
                 </a:solidFill>
                 <a:latin typeface="Amiri" pitchFamily="2" charset="-78"/>
+                <a:ea typeface="Amiri" pitchFamily="2" charset="-78"/>
                 <a:cs typeface="Amiri" pitchFamily="2" charset="-78"/>
               </a:rPr>
               <a:t>طَالِبَاتٌ</a:t>
@@ -25180,6 +25337,7 @@
                   <a:srgbClr val="D4AF37"/>
                 </a:solidFill>
                 <a:latin typeface="Amiri" pitchFamily="2" charset="-78"/>
+                <a:ea typeface="Amiri" pitchFamily="2" charset="-78"/>
                 <a:cs typeface="Amiri" pitchFamily="2" charset="-78"/>
               </a:rPr>
               <a:t>م</a:t>
@@ -25500,6 +25658,7 @@
                   <a:srgbClr val="8A6D1E"/>
                 </a:solidFill>
                 <a:latin typeface="Amiri" pitchFamily="2" charset="-78"/>
+                <a:ea typeface="Amiri" pitchFamily="2" charset="-78"/>
                 <a:cs typeface="Amiri" pitchFamily="2" charset="-78"/>
               </a:rPr>
               <a:t>اِقْرَأْ وَلَاحِظْ</a:t>
@@ -25613,6 +25772,7 @@
                   <a:srgbClr val="1F2A37"/>
                 </a:solidFill>
                 <a:latin typeface="Amiri" pitchFamily="2" charset="-78"/>
+                <a:ea typeface="Amiri" pitchFamily="2" charset="-78"/>
                 <a:cs typeface="Amiri" pitchFamily="2" charset="-78"/>
               </a:rPr>
               <a:t>فِي مَدْرَسَتِنَا طَالِبَانِ جَدِيدَانِ وَمُعَلِّمَاتٌ خَبِيرَاتٌ. الْمُعَلِّمَاتُ لَطِيفَاتٌ، وَالطَّالِبَاتُ يُحْبِبْنَهُنَّ. فِي الْمَسَاءِ أَرَى الطَّالِبَاتِ فِي الْمَكْتَبَةِ، وَأَسْمَعُ الْحِكَايَاتِ الْجَمِيلَةَ. أَمَامَ الْمَدْرَسَةِ سَيَّارَاتٌ كَثِيرَةٌ.</a:t>
@@ -25723,6 +25883,7 @@
                   <a:srgbClr val="1B3B6F"/>
                 </a:solidFill>
                 <a:latin typeface="Amiri" pitchFamily="2" charset="-78"/>
+                <a:ea typeface="Amiri" pitchFamily="2" charset="-78"/>
                 <a:cs typeface="Amiri" pitchFamily="2" charset="-78"/>
               </a:rPr>
               <a:t>خَبِيرَاتٌ</a:t>
@@ -25799,6 +25960,7 @@
                   <a:srgbClr val="1B3B6F"/>
                 </a:solidFill>
                 <a:latin typeface="Amiri" pitchFamily="2" charset="-78"/>
+                <a:ea typeface="Amiri" pitchFamily="2" charset="-78"/>
                 <a:cs typeface="Amiri" pitchFamily="2" charset="-78"/>
               </a:rPr>
               <a:t>لَطِيفَاتٌ</a:t>
@@ -25875,6 +26037,7 @@
                   <a:srgbClr val="1B3B6F"/>
                 </a:solidFill>
                 <a:latin typeface="Amiri" pitchFamily="2" charset="-78"/>
+                <a:ea typeface="Amiri" pitchFamily="2" charset="-78"/>
                 <a:cs typeface="Amiri" pitchFamily="2" charset="-78"/>
               </a:rPr>
               <a:t>يُحْبِبْنَهُنَّ</a:t>
@@ -25951,6 +26114,7 @@
                   <a:srgbClr val="1B3B6F"/>
                 </a:solidFill>
                 <a:latin typeface="Amiri" pitchFamily="2" charset="-78"/>
+                <a:ea typeface="Amiri" pitchFamily="2" charset="-78"/>
                 <a:cs typeface="Amiri" pitchFamily="2" charset="-78"/>
               </a:rPr>
               <a:t>أَرَى</a:t>
@@ -26027,6 +26191,7 @@
                   <a:srgbClr val="1B3B6F"/>
                 </a:solidFill>
                 <a:latin typeface="Amiri" pitchFamily="2" charset="-78"/>
+                <a:ea typeface="Amiri" pitchFamily="2" charset="-78"/>
                 <a:cs typeface="Amiri" pitchFamily="2" charset="-78"/>
               </a:rPr>
               <a:t>الْحِكَايَاتِ</a:t>
@@ -26103,6 +26268,7 @@
                   <a:srgbClr val="1B3B6F"/>
                 </a:solidFill>
                 <a:latin typeface="Amiri" pitchFamily="2" charset="-78"/>
+                <a:ea typeface="Amiri" pitchFamily="2" charset="-78"/>
                 <a:cs typeface="Amiri" pitchFamily="2" charset="-78"/>
               </a:rPr>
               <a:t>أَمَامَ</a:t>
@@ -26179,6 +26345,7 @@
                   <a:srgbClr val="1B3B6F"/>
                 </a:solidFill>
                 <a:latin typeface="Amiri" pitchFamily="2" charset="-78"/>
+                <a:ea typeface="Amiri" pitchFamily="2" charset="-78"/>
                 <a:cs typeface="Amiri" pitchFamily="2" charset="-78"/>
               </a:rPr>
               <a:t>كَثِيرَةٌ</a:t>
@@ -26350,6 +26517,7 @@
                   <a:srgbClr val="D4AF37"/>
                 </a:solidFill>
                 <a:latin typeface="Amiri" pitchFamily="2" charset="-78"/>
+                <a:ea typeface="Amiri" pitchFamily="2" charset="-78"/>
                 <a:cs typeface="Amiri" pitchFamily="2" charset="-78"/>
               </a:rPr>
               <a:t>م</a:t>
@@ -26670,6 +26838,7 @@
                   <a:srgbClr val="8A6D1E"/>
                 </a:solidFill>
                 <a:latin typeface="Amiri" pitchFamily="2" charset="-78"/>
+                <a:ea typeface="Amiri" pitchFamily="2" charset="-78"/>
                 <a:cs typeface="Amiri" pitchFamily="2" charset="-78"/>
               </a:rPr>
               <a:t>أَسْئِلَةُ القِرَاءَةِ</a:t>
@@ -26856,6 +27025,7 @@
                   <a:srgbClr val="1B3B6F"/>
                 </a:solidFill>
                 <a:latin typeface="Amiri" pitchFamily="2" charset="-78"/>
+                <a:ea typeface="Amiri" pitchFamily="2" charset="-78"/>
                 <a:cs typeface="Amiri" pitchFamily="2" charset="-78"/>
               </a:rPr>
               <a:t>الطَّالِبَاتِ</a:t>
@@ -27084,6 +27254,7 @@
                   <a:srgbClr val="1F2A37"/>
                 </a:solidFill>
                 <a:latin typeface="Amiri" pitchFamily="2" charset="-78"/>
+                <a:ea typeface="Amiri" pitchFamily="2" charset="-78"/>
                 <a:cs typeface="Amiri" pitchFamily="2" charset="-78"/>
               </a:rPr>
               <a:t>أَرَى</a:t>
@@ -27346,6 +27517,7 @@
                   <a:srgbClr val="1B3B6F"/>
                 </a:solidFill>
                 <a:latin typeface="Amiri" pitchFamily="2" charset="-78"/>
+                <a:ea typeface="Amiri" pitchFamily="2" charset="-78"/>
                 <a:cs typeface="Amiri" pitchFamily="2" charset="-78"/>
               </a:rPr>
               <a:t>لَطِيفَاتٌ</a:t>
@@ -27810,6 +27982,7 @@
                   <a:srgbClr val="1B3B6F"/>
                 </a:solidFill>
                 <a:latin typeface="Amiri" pitchFamily="2" charset="-78"/>
+                <a:ea typeface="Amiri" pitchFamily="2" charset="-78"/>
                 <a:cs typeface="Amiri" pitchFamily="2" charset="-78"/>
               </a:rPr>
               <a:t>سَيَّارَاتٌ كَثِيرَةٌ</a:t>
@@ -28274,6 +28447,7 @@
                   <a:srgbClr val="1B3B6F"/>
                 </a:solidFill>
                 <a:latin typeface="Amiri" pitchFamily="2" charset="-78"/>
+                <a:ea typeface="Amiri" pitchFamily="2" charset="-78"/>
                 <a:cs typeface="Amiri" pitchFamily="2" charset="-78"/>
               </a:rPr>
               <a:t>الْحِكَايَاتِ</a:t>
@@ -28388,6 +28562,7 @@
                   <a:srgbClr val="1F2A37"/>
                 </a:solidFill>
                 <a:latin typeface="Amiri" pitchFamily="2" charset="-78"/>
+                <a:ea typeface="Amiri" pitchFamily="2" charset="-78"/>
                 <a:cs typeface="Amiri" pitchFamily="2" charset="-78"/>
               </a:rPr>
               <a:t>حِكَايٌ</a:t>
@@ -28489,6 +28664,7 @@
                   <a:srgbClr val="1F2A37"/>
                 </a:solidFill>
                 <a:latin typeface="Amiri" pitchFamily="2" charset="-78"/>
+                <a:ea typeface="Amiri" pitchFamily="2" charset="-78"/>
                 <a:cs typeface="Amiri" pitchFamily="2" charset="-78"/>
               </a:rPr>
               <a:t>حِكَايَةٌ</a:t>
@@ -28590,6 +28766,7 @@
                   <a:srgbClr val="1F2A37"/>
                 </a:solidFill>
                 <a:latin typeface="Amiri" pitchFamily="2" charset="-78"/>
+                <a:ea typeface="Amiri" pitchFamily="2" charset="-78"/>
                 <a:cs typeface="Amiri" pitchFamily="2" charset="-78"/>
               </a:rPr>
               <a:t>حَكَى</a:t>
@@ -28865,6 +29042,7 @@
                   <a:srgbClr val="D4AF37"/>
                 </a:solidFill>
                 <a:latin typeface="Amiri" pitchFamily="2" charset="-78"/>
+                <a:ea typeface="Amiri" pitchFamily="2" charset="-78"/>
                 <a:cs typeface="Amiri" pitchFamily="2" charset="-78"/>
               </a:rPr>
               <a:t>م</a:t>
@@ -29185,6 +29363,7 @@
                   <a:srgbClr val="8A6D1E"/>
                 </a:solidFill>
                 <a:latin typeface="Amiri" pitchFamily="2" charset="-78"/>
+                <a:ea typeface="Amiri" pitchFamily="2" charset="-78"/>
                 <a:cs typeface="Amiri" pitchFamily="2" charset="-78"/>
               </a:rPr>
               <a:t>إِجَابَاتُ القِرَاءَةِ</a:t>
@@ -29371,6 +29550,7 @@
                   <a:srgbClr val="1B3B6F"/>
                 </a:solidFill>
                 <a:latin typeface="Amiri" pitchFamily="2" charset="-78"/>
+                <a:ea typeface="Amiri" pitchFamily="2" charset="-78"/>
                 <a:cs typeface="Amiri" pitchFamily="2" charset="-78"/>
               </a:rPr>
               <a:t>الطَّالِبَاتِ</a:t>
@@ -29626,6 +29806,7 @@
                   <a:srgbClr val="1F2A37"/>
                 </a:solidFill>
                 <a:latin typeface="Amiri" pitchFamily="2" charset="-78"/>
+                <a:ea typeface="Amiri" pitchFamily="2" charset="-78"/>
                 <a:cs typeface="Amiri" pitchFamily="2" charset="-78"/>
               </a:rPr>
               <a:t>أَرَى</a:t>
@@ -29926,6 +30107,7 @@
                   <a:srgbClr val="1B3B6F"/>
                 </a:solidFill>
                 <a:latin typeface="Amiri" pitchFamily="2" charset="-78"/>
+                <a:ea typeface="Amiri" pitchFamily="2" charset="-78"/>
                 <a:cs typeface="Amiri" pitchFamily="2" charset="-78"/>
               </a:rPr>
               <a:t>لَطِيفَاتٌ</a:t>
@@ -30455,6 +30637,7 @@
                   <a:srgbClr val="1B3B6F"/>
                 </a:solidFill>
                 <a:latin typeface="Amiri" pitchFamily="2" charset="-78"/>
+                <a:ea typeface="Amiri" pitchFamily="2" charset="-78"/>
                 <a:cs typeface="Amiri" pitchFamily="2" charset="-78"/>
               </a:rPr>
               <a:t>سَيَّارَاتٌ كَثِيرَةٌ</a:t>
@@ -30984,6 +31167,7 @@
                   <a:srgbClr val="1B3B6F"/>
                 </a:solidFill>
                 <a:latin typeface="Amiri" pitchFamily="2" charset="-78"/>
+                <a:ea typeface="Amiri" pitchFamily="2" charset="-78"/>
                 <a:cs typeface="Amiri" pitchFamily="2" charset="-78"/>
               </a:rPr>
               <a:t>الْحِكَايَاتِ</a:t>
@@ -31098,6 +31282,7 @@
                   <a:srgbClr val="9AA1AB"/>
                 </a:solidFill>
                 <a:latin typeface="Amiri" pitchFamily="2" charset="-78"/>
+                <a:ea typeface="Amiri" pitchFamily="2" charset="-78"/>
                 <a:cs typeface="Amiri" pitchFamily="2" charset="-78"/>
               </a:rPr>
               <a:t>حِكَايٌ</a:t>
@@ -31226,6 +31411,7 @@
                   <a:srgbClr val="1F2A37"/>
                 </a:solidFill>
                 <a:latin typeface="Amiri" pitchFamily="2" charset="-78"/>
+                <a:ea typeface="Amiri" pitchFamily="2" charset="-78"/>
                 <a:cs typeface="Amiri" pitchFamily="2" charset="-78"/>
               </a:rPr>
               <a:t>حِكَايَةٌ</a:t>
@@ -31327,6 +31513,7 @@
                   <a:srgbClr val="9AA1AB"/>
                 </a:solidFill>
                 <a:latin typeface="Amiri" pitchFamily="2" charset="-78"/>
+                <a:ea typeface="Amiri" pitchFamily="2" charset="-78"/>
                 <a:cs typeface="Amiri" pitchFamily="2" charset="-78"/>
               </a:rPr>
               <a:t>حَكَى</a:t>
@@ -31640,6 +31827,7 @@
                   <a:srgbClr val="D4AF37"/>
                 </a:solidFill>
                 <a:latin typeface="Amiri" pitchFamily="2" charset="-78"/>
+                <a:ea typeface="Amiri" pitchFamily="2" charset="-78"/>
                 <a:cs typeface="Amiri" pitchFamily="2" charset="-78"/>
               </a:rPr>
               <a:t>م</a:t>
@@ -31960,6 +32148,7 @@
                   <a:srgbClr val="8A6D1E"/>
                 </a:solidFill>
                 <a:latin typeface="Amiri" pitchFamily="2" charset="-78"/>
+                <a:ea typeface="Amiri" pitchFamily="2" charset="-78"/>
                 <a:cs typeface="Amiri" pitchFamily="2" charset="-78"/>
               </a:rPr>
               <a:t>التَّحَدُّثُ</a:t>
@@ -32730,6 +32919,7 @@
                   <a:srgbClr val="1B3B6F"/>
                 </a:solidFill>
                 <a:latin typeface="Amiri" pitchFamily="2" charset="-78"/>
+                <a:ea typeface="Amiri" pitchFamily="2" charset="-78"/>
                 <a:cs typeface="Amiri" pitchFamily="2" charset="-78"/>
               </a:rPr>
               <a:t>مَنِ الْمُعَلِّمَاتُ فِي مَدْرَسَتِكَ؟</a:t>
@@ -32867,6 +33057,7 @@
                   <a:srgbClr val="1B3B6F"/>
                 </a:solidFill>
                 <a:latin typeface="Amiri" pitchFamily="2" charset="-78"/>
+                <a:ea typeface="Amiri" pitchFamily="2" charset="-78"/>
                 <a:cs typeface="Amiri" pitchFamily="2" charset="-78"/>
               </a:rPr>
               <a:t>صِفِ الطَّالِبَاتِ فِي صَفِّكَ أَوْ صَفِّ أُخْتِكَ.</a:t>
@@ -33004,6 +33195,7 @@
                   <a:srgbClr val="1B3B6F"/>
                 </a:solidFill>
                 <a:latin typeface="Amiri" pitchFamily="2" charset="-78"/>
+                <a:ea typeface="Amiri" pitchFamily="2" charset="-78"/>
                 <a:cs typeface="Amiri" pitchFamily="2" charset="-78"/>
               </a:rPr>
               <a:t>مَاذَا فِي شَارِعِكَ؟ (سَيَّارَاتٌ، حَافِلَاتٌ …)</a:t>
@@ -33179,6 +33371,7 @@
                   <a:srgbClr val="1D5FBF"/>
                 </a:solidFill>
                 <a:latin typeface="Amiri" pitchFamily="2" charset="-78"/>
+                <a:ea typeface="Amiri" pitchFamily="2" charset="-78"/>
                 <a:cs typeface="Amiri" pitchFamily="2" charset="-78"/>
               </a:rPr>
               <a:t>فِي مَدْرَسَتِي مُعَلِّمَاتٌ ___ .</a:t>
@@ -33282,6 +33475,7 @@
                   <a:srgbClr val="1F2A37"/>
                 </a:solidFill>
                 <a:latin typeface="Amiri" pitchFamily="2" charset="-78"/>
+                <a:ea typeface="Amiri" pitchFamily="2" charset="-78"/>
                 <a:cs typeface="Amiri" pitchFamily="2" charset="-78"/>
               </a:rPr>
               <a:t>الطَّالِبَاتُ ___ وَ ___ .</a:t>
@@ -33385,6 +33579,7 @@
                   <a:srgbClr val="1F2A37"/>
                 </a:solidFill>
                 <a:latin typeface="Amiri" pitchFamily="2" charset="-78"/>
+                <a:ea typeface="Amiri" pitchFamily="2" charset="-78"/>
                 <a:cs typeface="Amiri" pitchFamily="2" charset="-78"/>
               </a:rPr>
               <a:t>فِي شَارِعِي سَيَّارَاتٌ ___ .</a:t>
@@ -33558,6 +33753,7 @@
                   <a:srgbClr val="1F2A37"/>
                 </a:solidFill>
                 <a:latin typeface="Amiri" pitchFamily="2" charset="-78"/>
+                <a:ea typeface="Amiri" pitchFamily="2" charset="-78"/>
                 <a:cs typeface="Amiri" pitchFamily="2" charset="-78"/>
               </a:rPr>
               <a:t>كَيْفَ الْمُعَلِّمَاتُ فِي مَدْرَسَتِكِ؟</a:t>
@@ -33697,6 +33893,7 @@
                   <a:srgbClr val="1F2A37"/>
                 </a:solidFill>
                 <a:latin typeface="Amiri" pitchFamily="2" charset="-78"/>
+                <a:ea typeface="Amiri" pitchFamily="2" charset="-78"/>
                 <a:cs typeface="Amiri" pitchFamily="2" charset="-78"/>
               </a:rPr>
               <a:t>الْمُعَلِّمَاتُ لَطِيفَاتٌ وَخَبِيرَاتٌ، وَأُحِبُّ الْمُعَلِّمَاتِ كَثِيرًا.</a:t>
@@ -33868,6 +34065,7 @@
                   <a:srgbClr val="D4AF37"/>
                 </a:solidFill>
                 <a:latin typeface="Amiri" pitchFamily="2" charset="-78"/>
+                <a:ea typeface="Amiri" pitchFamily="2" charset="-78"/>
                 <a:cs typeface="Amiri" pitchFamily="2" charset="-78"/>
               </a:rPr>
               <a:t>م</a:t>
@@ -34188,6 +34386,7 @@
                   <a:srgbClr val="8A6D1E"/>
                 </a:solidFill>
                 <a:latin typeface="Amiri" pitchFamily="2" charset="-78"/>
+                <a:ea typeface="Amiri" pitchFamily="2" charset="-78"/>
                 <a:cs typeface="Amiri" pitchFamily="2" charset="-78"/>
               </a:rPr>
               <a:t>اُكْتُبْ</a:t>
@@ -34363,6 +34562,7 @@
                   <a:srgbClr val="2E8B57"/>
                 </a:solidFill>
                 <a:latin typeface="Amiri" pitchFamily="2" charset="-78"/>
+                <a:ea typeface="Amiri" pitchFamily="2" charset="-78"/>
                 <a:cs typeface="Amiri" pitchFamily="2" charset="-78"/>
               </a:rPr>
               <a:t>الأَسَاسُ</a:t>
@@ -34657,6 +34857,7 @@
                   <a:srgbClr val="C9780A"/>
                 </a:solidFill>
                 <a:latin typeface="Amiri" pitchFamily="2" charset="-78"/>
+                <a:ea typeface="Amiri" pitchFamily="2" charset="-78"/>
                 <a:cs typeface="Amiri" pitchFamily="2" charset="-78"/>
               </a:rPr>
               <a:t>التَّطْوِيرُ</a:t>
@@ -34951,6 +35152,7 @@
                   <a:srgbClr val="B83227"/>
                 </a:solidFill>
                 <a:latin typeface="Amiri" pitchFamily="2" charset="-78"/>
+                <a:ea typeface="Amiri" pitchFamily="2" charset="-78"/>
                 <a:cs typeface="Amiri" pitchFamily="2" charset="-78"/>
               </a:rPr>
               <a:t>التَّحَدِّي</a:t>
@@ -35241,6 +35443,7 @@
                   <a:srgbClr val="D4AF37"/>
                 </a:solidFill>
                 <a:latin typeface="Amiri" pitchFamily="2" charset="-78"/>
+                <a:ea typeface="Amiri" pitchFamily="2" charset="-78"/>
                 <a:cs typeface="Amiri" pitchFamily="2" charset="-78"/>
               </a:rPr>
               <a:t>م</a:t>
@@ -35561,6 +35764,7 @@
                   <a:srgbClr val="8A6D1E"/>
                 </a:solidFill>
                 <a:latin typeface="Amiri" pitchFamily="2" charset="-78"/>
+                <a:ea typeface="Amiri" pitchFamily="2" charset="-78"/>
                 <a:cs typeface="Amiri" pitchFamily="2" charset="-78"/>
               </a:rPr>
               <a:t>قَوَالِبُ الجُمَلِ</a:t>
@@ -35736,6 +35940,7 @@
                   <a:srgbClr val="1B3B6F"/>
                 </a:solidFill>
                 <a:latin typeface="Amiri" pitchFamily="2" charset="-78"/>
+                <a:ea typeface="Amiri" pitchFamily="2" charset="-78"/>
                 <a:cs typeface="Amiri" pitchFamily="2" charset="-78"/>
               </a:rPr>
               <a:t>رَأَيْتُ الطَّالِبَاتِ ______ .</a:t>
@@ -35812,6 +36017,7 @@
                   <a:srgbClr val="1B3B6F"/>
                 </a:solidFill>
                 <a:latin typeface="Amiri" pitchFamily="2" charset="-78"/>
+                <a:ea typeface="Amiri" pitchFamily="2" charset="-78"/>
                 <a:cs typeface="Amiri" pitchFamily="2" charset="-78"/>
               </a:rPr>
               <a:t>أَتَحَدَّثُ مَعَ الْمُعَلِّمَاتِ ______ .</a:t>
@@ -35888,6 +36094,7 @@
                   <a:srgbClr val="1B3B6F"/>
                 </a:solidFill>
                 <a:latin typeface="Amiri" pitchFamily="2" charset="-78"/>
+                <a:ea typeface="Amiri" pitchFamily="2" charset="-78"/>
                 <a:cs typeface="Amiri" pitchFamily="2" charset="-78"/>
               </a:rPr>
               <a:t>أُحِبُّ الْحِكَايَاتِ ______ .</a:t>
@@ -35964,6 +36171,7 @@
                   <a:srgbClr val="1B3B6F"/>
                 </a:solidFill>
                 <a:latin typeface="Amiri" pitchFamily="2" charset="-78"/>
+                <a:ea typeface="Amiri" pitchFamily="2" charset="-78"/>
                 <a:cs typeface="Amiri" pitchFamily="2" charset="-78"/>
               </a:rPr>
               <a:t>فِي الْجَامِعَاتِ ______ .</a:t>
@@ -36139,6 +36347,7 @@
                   <a:srgbClr val="1B3B6F"/>
                 </a:solidFill>
                 <a:latin typeface="Amiri" pitchFamily="2" charset="-78"/>
+                <a:ea typeface="Amiri" pitchFamily="2" charset="-78"/>
                 <a:cs typeface="Amiri" pitchFamily="2" charset="-78"/>
               </a:rPr>
               <a:t>فِي مَدْرَسَتِي مُعَلِّمَاتٌ ______ .</a:t>
@@ -36215,6 +36424,7 @@
                   <a:srgbClr val="1B3B6F"/>
                 </a:solidFill>
                 <a:latin typeface="Amiri" pitchFamily="2" charset="-78"/>
+                <a:ea typeface="Amiri" pitchFamily="2" charset="-78"/>
                 <a:cs typeface="Amiri" pitchFamily="2" charset="-78"/>
               </a:rPr>
               <a:t>الطَّالِبَاتُ ______ .</a:t>
@@ -36291,6 +36501,7 @@
                   <a:srgbClr val="1B3B6F"/>
                 </a:solidFill>
                 <a:latin typeface="Amiri" pitchFamily="2" charset="-78"/>
+                <a:ea typeface="Amiri" pitchFamily="2" charset="-78"/>
                 <a:cs typeface="Amiri" pitchFamily="2" charset="-78"/>
               </a:rPr>
               <a:t>فِي الشَّارِعِ سَيَّارَاتٌ ______ .</a:t>
@@ -36367,6 +36578,7 @@
                   <a:srgbClr val="1B3B6F"/>
                 </a:solidFill>
                 <a:latin typeface="Amiri" pitchFamily="2" charset="-78"/>
+                <a:ea typeface="Amiri" pitchFamily="2" charset="-78"/>
                 <a:cs typeface="Amiri" pitchFamily="2" charset="-78"/>
               </a:rPr>
               <a:t>أَخَوَاتِي ______ .</a:t>
@@ -36515,6 +36727,7 @@
                   <a:srgbClr val="1B3B6F"/>
                 </a:solidFill>
                 <a:latin typeface="Amiri" pitchFamily="2" charset="-78"/>
+                <a:ea typeface="Amiri" pitchFamily="2" charset="-78"/>
                 <a:cs typeface="Amiri" pitchFamily="2" charset="-78"/>
               </a:rPr>
               <a:t>طَالِبَاتٌ  ·  مُعَلِّمَاتٌ  ·  أَخَوَاتٌ  ·  سَيَّارَاتٌ  ·  جَامِعَاتٌ  ·  حَافِلَاتٌ  ·  حِكَايَاتٌ  ·  نَشِيطَاتٌ  ·  لَطِيفَاتٌ  ·  خَبِيرَاتٌ  ·  كَثِيرَةٌ  ·  سَرِيعَةٌ</a:t>
@@ -36648,6 +36861,7 @@
                   <a:srgbClr val="D4AF37"/>
                 </a:solidFill>
                 <a:latin typeface="Amiri" pitchFamily="2" charset="-78"/>
+                <a:ea typeface="Amiri" pitchFamily="2" charset="-78"/>
                 <a:cs typeface="Amiri" pitchFamily="2" charset="-78"/>
               </a:rPr>
               <a:t>م</a:t>
@@ -36968,6 +37182,7 @@
                   <a:srgbClr val="8A6D1E"/>
                 </a:solidFill>
                 <a:latin typeface="Amiri" pitchFamily="2" charset="-78"/>
+                <a:ea typeface="Amiri" pitchFamily="2" charset="-78"/>
                 <a:cs typeface="Amiri" pitchFamily="2" charset="-78"/>
               </a:rPr>
               <a:t>مُهِمَّةُ التَّحَدِّي</a:t>
@@ -37443,6 +37658,7 @@
                   <a:srgbClr val="1B3B6F"/>
                 </a:solidFill>
                 <a:latin typeface="Amiri" pitchFamily="2" charset="-78"/>
+                <a:ea typeface="Amiri" pitchFamily="2" charset="-78"/>
                 <a:cs typeface="Amiri" pitchFamily="2" charset="-78"/>
               </a:rPr>
               <a:t>مُعَلِّمَاتٌ خَبِيرَاتٌ</a:t>
@@ -37519,6 +37735,7 @@
                   <a:srgbClr val="1B3B6F"/>
                 </a:solidFill>
                 <a:latin typeface="Amiri" pitchFamily="2" charset="-78"/>
+                <a:ea typeface="Amiri" pitchFamily="2" charset="-78"/>
                 <a:cs typeface="Amiri" pitchFamily="2" charset="-78"/>
               </a:rPr>
               <a:t>رَأَيْتُ الطَّالِبَاتِ</a:t>
@@ -37595,6 +37812,7 @@
                   <a:srgbClr val="1B3B6F"/>
                 </a:solidFill>
                 <a:latin typeface="Amiri" pitchFamily="2" charset="-78"/>
+                <a:ea typeface="Amiri" pitchFamily="2" charset="-78"/>
                 <a:cs typeface="Amiri" pitchFamily="2" charset="-78"/>
               </a:rPr>
               <a:t>مَعَ أَخَوَاتِي</a:t>
@@ -37671,6 +37889,7 @@
                   <a:srgbClr val="1B3B6F"/>
                 </a:solidFill>
                 <a:latin typeface="Amiri" pitchFamily="2" charset="-78"/>
+                <a:ea typeface="Amiri" pitchFamily="2" charset="-78"/>
                 <a:cs typeface="Amiri" pitchFamily="2" charset="-78"/>
               </a:rPr>
               <a:t>السَّيَّارَاتُ سَرِيعَةٌ</a:t>
@@ -37747,6 +37966,7 @@
                   <a:srgbClr val="1B3B6F"/>
                 </a:solidFill>
                 <a:latin typeface="Amiri" pitchFamily="2" charset="-78"/>
+                <a:ea typeface="Amiri" pitchFamily="2" charset="-78"/>
                 <a:cs typeface="Amiri" pitchFamily="2" charset="-78"/>
               </a:rPr>
               <a:t>فِي الْجَامِعَاتِ</a:t>
@@ -37823,6 +38043,7 @@
                   <a:srgbClr val="1B3B6F"/>
                 </a:solidFill>
                 <a:latin typeface="Amiri" pitchFamily="2" charset="-78"/>
+                <a:ea typeface="Amiri" pitchFamily="2" charset="-78"/>
                 <a:cs typeface="Amiri" pitchFamily="2" charset="-78"/>
               </a:rPr>
               <a:t>الْمَدَارِسُ كَبِيرَةٌ</a:t>
@@ -37994,6 +38215,7 @@
                   <a:srgbClr val="D4AF37"/>
                 </a:solidFill>
                 <a:latin typeface="Amiri" pitchFamily="2" charset="-78"/>
+                <a:ea typeface="Amiri" pitchFamily="2" charset="-78"/>
                 <a:cs typeface="Amiri" pitchFamily="2" charset="-78"/>
               </a:rPr>
               <a:t>م</a:t>
@@ -38314,6 +38536,7 @@
                   <a:srgbClr val="8A6D1E"/>
                 </a:solidFill>
                 <a:latin typeface="Amiri" pitchFamily="2" charset="-78"/>
+                <a:ea typeface="Amiri" pitchFamily="2" charset="-78"/>
                 <a:cs typeface="Amiri" pitchFamily="2" charset="-78"/>
               </a:rPr>
               <a:t>نَمُوذَجُ الإِجَابَةِ</a:t>
@@ -38427,6 +38650,7 @@
                   <a:srgbClr val="1F2A37"/>
                 </a:solidFill>
                 <a:latin typeface="Amiri" pitchFamily="2" charset="-78"/>
+                <a:ea typeface="Amiri" pitchFamily="2" charset="-78"/>
                 <a:cs typeface="Amiri" pitchFamily="2" charset="-78"/>
               </a:rPr>
               <a:t>عِنْدِي ثَلَاثُ أَخَوَاتٍ، وَهُنَّ طَالِبَاتٌ مُجْتَهِدَاتٌ. تَدْرُسُ أُخْتِي الْكَبِيرَةُ فِي الْجَامِعَةِ، وَتُحِبُّ الْمُعَلِّمَاتِ هُنَاكَ. فِي الْمَسَاءِ أُسَاعِدُ أَخَوَاتِي فِي الْوَاجِبَاتِ. فِي شَارِعِنَا سَيَّارَاتٌ كَثِيرَةٌ وَحَافِلَاتٌ كَبِيرَةٌ، وَفِي مَدِينَتِنَا مَدَارِسُ حَدِيثَةٌ.</a:t>
@@ -38923,6 +39147,7 @@
                   <a:srgbClr val="D4AF37"/>
                 </a:solidFill>
                 <a:latin typeface="Amiri" pitchFamily="2" charset="-78"/>
+                <a:ea typeface="Amiri" pitchFamily="2" charset="-78"/>
                 <a:cs typeface="Amiri" pitchFamily="2" charset="-78"/>
               </a:rPr>
               <a:t>م</a:t>
@@ -39243,6 +39468,7 @@
                   <a:srgbClr val="8A6D1E"/>
                 </a:solidFill>
                 <a:latin typeface="Amiri" pitchFamily="2" charset="-78"/>
+                <a:ea typeface="Amiri" pitchFamily="2" charset="-78"/>
                 <a:cs typeface="Amiri" pitchFamily="2" charset="-78"/>
               </a:rPr>
               <a:t>قَيِّمْ عَمَلَكَ</a:t>
@@ -40400,6 +40626,7 @@
                   <a:srgbClr val="D4AF37"/>
                 </a:solidFill>
                 <a:latin typeface="Amiri" pitchFamily="2" charset="-78"/>
+                <a:ea typeface="Amiri" pitchFamily="2" charset="-78"/>
                 <a:cs typeface="Amiri" pitchFamily="2" charset="-78"/>
               </a:rPr>
               <a:t>م</a:t>
@@ -40720,6 +40947,7 @@
                   <a:srgbClr val="8A6D1E"/>
                 </a:solidFill>
                 <a:latin typeface="Amiri" pitchFamily="2" charset="-78"/>
+                <a:ea typeface="Amiri" pitchFamily="2" charset="-78"/>
                 <a:cs typeface="Amiri" pitchFamily="2" charset="-78"/>
               </a:rPr>
               <a:t>خَرِيطَةُ الدَّرْسِ</a:t>
@@ -41034,6 +41262,7 @@
                   <a:srgbClr val="0E7C86"/>
                 </a:solidFill>
                 <a:latin typeface="Amiri" pitchFamily="2" charset="-78"/>
+                <a:ea typeface="Amiri" pitchFamily="2" charset="-78"/>
                 <a:cs typeface="Amiri" pitchFamily="2" charset="-78"/>
               </a:rPr>
               <a:t>اِبْدَأِ الآنَ</a:t>
@@ -41310,6 +41539,7 @@
                   <a:srgbClr val="1B3B6F"/>
                 </a:solidFill>
                 <a:latin typeface="Amiri" pitchFamily="2" charset="-78"/>
+                <a:ea typeface="Amiri" pitchFamily="2" charset="-78"/>
                 <a:cs typeface="Amiri" pitchFamily="2" charset="-78"/>
               </a:rPr>
               <a:t>كَلِمَاتٌ وَقَوَاعِدُ</a:t>
@@ -41586,6 +41816,7 @@
                   <a:srgbClr val="6B4C9A"/>
                 </a:solidFill>
                 <a:latin typeface="Amiri" pitchFamily="2" charset="-78"/>
+                <a:ea typeface="Amiri" pitchFamily="2" charset="-78"/>
                 <a:cs typeface="Amiri" pitchFamily="2" charset="-78"/>
               </a:rPr>
               <a:t>شَاهِدْ</a:t>
@@ -41862,6 +42093,7 @@
                   <a:srgbClr val="2F6FB0"/>
                 </a:solidFill>
                 <a:latin typeface="Amiri" pitchFamily="2" charset="-78"/>
+                <a:ea typeface="Amiri" pitchFamily="2" charset="-78"/>
                 <a:cs typeface="Amiri" pitchFamily="2" charset="-78"/>
               </a:rPr>
               <a:t>مَعًا</a:t>
@@ -42138,6 +42370,7 @@
                   <a:srgbClr val="1E6B52"/>
                 </a:solidFill>
                 <a:latin typeface="Amiri" pitchFamily="2" charset="-78"/>
+                <a:ea typeface="Amiri" pitchFamily="2" charset="-78"/>
                 <a:cs typeface="Amiri" pitchFamily="2" charset="-78"/>
               </a:rPr>
               <a:t>وَحْدَكَ</a:t>
@@ -42414,6 +42647,7 @@
                   <a:srgbClr val="8A6D1E"/>
                 </a:solidFill>
                 <a:latin typeface="Amiri" pitchFamily="2" charset="-78"/>
+                <a:ea typeface="Amiri" pitchFamily="2" charset="-78"/>
                 <a:cs typeface="Amiri" pitchFamily="2" charset="-78"/>
               </a:rPr>
               <a:t>قَيِّمْ عَمَلَكَ</a:t>
@@ -42690,6 +42924,7 @@
                   <a:srgbClr val="C45A3C"/>
                 </a:solidFill>
                 <a:latin typeface="Amiri" pitchFamily="2" charset="-78"/>
+                <a:ea typeface="Amiri" pitchFamily="2" charset="-78"/>
                 <a:cs typeface="Amiri" pitchFamily="2" charset="-78"/>
               </a:rPr>
               <a:t>اِسْتَعِدَّ</a:t>
@@ -42933,6 +43168,7 @@
                   <a:srgbClr val="D4AF37"/>
                 </a:solidFill>
                 <a:latin typeface="Amiri" pitchFamily="2" charset="-78"/>
+                <a:ea typeface="Amiri" pitchFamily="2" charset="-78"/>
                 <a:cs typeface="Amiri" pitchFamily="2" charset="-78"/>
               </a:rPr>
               <a:t>م</a:t>
@@ -43253,6 +43489,7 @@
                   <a:srgbClr val="8A6D1E"/>
                 </a:solidFill>
                 <a:latin typeface="Amiri" pitchFamily="2" charset="-78"/>
+                <a:ea typeface="Amiri" pitchFamily="2" charset="-78"/>
                 <a:cs typeface="Amiri" pitchFamily="2" charset="-78"/>
               </a:rPr>
               <a:t>تَذْكِرَةُ الخُرُوجِ</a:t>
@@ -43439,6 +43676,7 @@
                   <a:srgbClr val="1B3B6F"/>
                 </a:solidFill>
                 <a:latin typeface="Amiri" pitchFamily="2" charset="-78"/>
+                <a:ea typeface="Amiri" pitchFamily="2" charset="-78"/>
                 <a:cs typeface="Amiri" pitchFamily="2" charset="-78"/>
               </a:rPr>
               <a:t>جَامِعَةٌ</a:t>
@@ -43553,6 +43791,7 @@
                   <a:srgbClr val="1F2A37"/>
                 </a:solidFill>
                 <a:latin typeface="Amiri" pitchFamily="2" charset="-78"/>
+                <a:ea typeface="Amiri" pitchFamily="2" charset="-78"/>
                 <a:cs typeface="Amiri" pitchFamily="2" charset="-78"/>
               </a:rPr>
               <a:t>جَامِعَاتٌ</a:t>
@@ -43654,6 +43893,7 @@
                   <a:srgbClr val="1F2A37"/>
                 </a:solidFill>
                 <a:latin typeface="Amiri" pitchFamily="2" charset="-78"/>
+                <a:ea typeface="Amiri" pitchFamily="2" charset="-78"/>
                 <a:cs typeface="Amiri" pitchFamily="2" charset="-78"/>
               </a:rPr>
               <a:t>جَامِعُونَ</a:t>
@@ -43755,6 +43995,7 @@
                   <a:srgbClr val="1F2A37"/>
                 </a:solidFill>
                 <a:latin typeface="Amiri" pitchFamily="2" charset="-78"/>
+                <a:ea typeface="Amiri" pitchFamily="2" charset="-78"/>
                 <a:cs typeface="Amiri" pitchFamily="2" charset="-78"/>
               </a:rPr>
               <a:t>جَوَامِعُ</a:t>
@@ -43991,6 +44232,7 @@
                   <a:srgbClr val="1F2A37"/>
                 </a:solidFill>
                 <a:latin typeface="Amiri" pitchFamily="2" charset="-78"/>
+                <a:ea typeface="Amiri" pitchFamily="2" charset="-78"/>
                 <a:cs typeface="Amiri" pitchFamily="2" charset="-78"/>
               </a:rPr>
               <a:t>زُرْتُ الْجَامِعَاتَ.</a:t>
@@ -44092,6 +44334,7 @@
                   <a:srgbClr val="1F2A37"/>
                 </a:solidFill>
                 <a:latin typeface="Amiri" pitchFamily="2" charset="-78"/>
+                <a:ea typeface="Amiri" pitchFamily="2" charset="-78"/>
                 <a:cs typeface="Amiri" pitchFamily="2" charset="-78"/>
               </a:rPr>
               <a:t>زُرْتُ الْجَامِعَاتِ.</a:t>
@@ -44193,6 +44436,7 @@
                   <a:srgbClr val="1F2A37"/>
                 </a:solidFill>
                 <a:latin typeface="Amiri" pitchFamily="2" charset="-78"/>
+                <a:ea typeface="Amiri" pitchFamily="2" charset="-78"/>
                 <a:cs typeface="Amiri" pitchFamily="2" charset="-78"/>
               </a:rPr>
               <a:t>زُرْتُ الْجَامِعَاتُ.</a:t>
@@ -44429,6 +44673,7 @@
                   <a:srgbClr val="1F2A37"/>
                 </a:solidFill>
                 <a:latin typeface="Amiri" pitchFamily="2" charset="-78"/>
+                <a:ea typeface="Amiri" pitchFamily="2" charset="-78"/>
                 <a:cs typeface="Amiri" pitchFamily="2" charset="-78"/>
               </a:rPr>
               <a:t>السَّيَّارَاتُ جَدِيدَةٌ</a:t>
@@ -44530,6 +44775,7 @@
                   <a:srgbClr val="1F2A37"/>
                 </a:solidFill>
                 <a:latin typeface="Amiri" pitchFamily="2" charset="-78"/>
+                <a:ea typeface="Amiri" pitchFamily="2" charset="-78"/>
                 <a:cs typeface="Amiri" pitchFamily="2" charset="-78"/>
               </a:rPr>
               <a:t>السَّيَّارَاتُ جَدِيدَاتٌ</a:t>
@@ -44631,6 +44877,7 @@
                   <a:srgbClr val="1F2A37"/>
                 </a:solidFill>
                 <a:latin typeface="Amiri" pitchFamily="2" charset="-78"/>
+                <a:ea typeface="Amiri" pitchFamily="2" charset="-78"/>
                 <a:cs typeface="Amiri" pitchFamily="2" charset="-78"/>
               </a:rPr>
               <a:t>السَّيَّارَاتُ جُدُدٌ</a:t>
@@ -44874,6 +45121,7 @@
                   <a:srgbClr val="D4AF37"/>
                 </a:solidFill>
                 <a:latin typeface="Amiri" pitchFamily="2" charset="-78"/>
+                <a:ea typeface="Amiri" pitchFamily="2" charset="-78"/>
                 <a:cs typeface="Amiri" pitchFamily="2" charset="-78"/>
               </a:rPr>
               <a:t>م</a:t>
@@ -45194,6 +45442,7 @@
                   <a:srgbClr val="8A6D1E"/>
                 </a:solidFill>
                 <a:latin typeface="Amiri" pitchFamily="2" charset="-78"/>
+                <a:ea typeface="Amiri" pitchFamily="2" charset="-78"/>
                 <a:cs typeface="Amiri" pitchFamily="2" charset="-78"/>
               </a:rPr>
               <a:t>إِجَابَاتُ تَذْكِرَةِ الخُرُوجِ</a:t>
@@ -45380,6 +45629,7 @@
                   <a:srgbClr val="1B3B6F"/>
                 </a:solidFill>
                 <a:latin typeface="Amiri" pitchFamily="2" charset="-78"/>
+                <a:ea typeface="Amiri" pitchFamily="2" charset="-78"/>
                 <a:cs typeface="Amiri" pitchFamily="2" charset="-78"/>
               </a:rPr>
               <a:t>جَامِعَةٌ</a:t>
@@ -45521,6 +45771,7 @@
                   <a:srgbClr val="1F2A37"/>
                 </a:solidFill>
                 <a:latin typeface="Amiri" pitchFamily="2" charset="-78"/>
+                <a:ea typeface="Amiri" pitchFamily="2" charset="-78"/>
                 <a:cs typeface="Amiri" pitchFamily="2" charset="-78"/>
               </a:rPr>
               <a:t>جَامِعَاتٌ</a:t>
@@ -45622,6 +45873,7 @@
                   <a:srgbClr val="9AA1AB"/>
                 </a:solidFill>
                 <a:latin typeface="Amiri" pitchFamily="2" charset="-78"/>
+                <a:ea typeface="Amiri" pitchFamily="2" charset="-78"/>
                 <a:cs typeface="Amiri" pitchFamily="2" charset="-78"/>
               </a:rPr>
               <a:t>جَامِعُونَ</a:t>
@@ -45723,6 +45975,7 @@
                   <a:srgbClr val="9AA1AB"/>
                 </a:solidFill>
                 <a:latin typeface="Amiri" pitchFamily="2" charset="-78"/>
+                <a:ea typeface="Amiri" pitchFamily="2" charset="-78"/>
                 <a:cs typeface="Amiri" pitchFamily="2" charset="-78"/>
               </a:rPr>
               <a:t>جَوَامِعُ</a:t>
@@ -45997,6 +46250,7 @@
                   <a:srgbClr val="9AA1AB"/>
                 </a:solidFill>
                 <a:latin typeface="Amiri" pitchFamily="2" charset="-78"/>
+                <a:ea typeface="Amiri" pitchFamily="2" charset="-78"/>
                 <a:cs typeface="Amiri" pitchFamily="2" charset="-78"/>
               </a:rPr>
               <a:t>زُرْتُ الْجَامِعَاتَ.</a:t>
@@ -46125,6 +46379,7 @@
                   <a:srgbClr val="1F2A37"/>
                 </a:solidFill>
                 <a:latin typeface="Amiri" pitchFamily="2" charset="-78"/>
+                <a:ea typeface="Amiri" pitchFamily="2" charset="-78"/>
                 <a:cs typeface="Amiri" pitchFamily="2" charset="-78"/>
               </a:rPr>
               <a:t>زُرْتُ الْجَامِعَاتِ.</a:t>
@@ -46226,6 +46481,7 @@
                   <a:srgbClr val="9AA1AB"/>
                 </a:solidFill>
                 <a:latin typeface="Amiri" pitchFamily="2" charset="-78"/>
+                <a:ea typeface="Amiri" pitchFamily="2" charset="-78"/>
                 <a:cs typeface="Amiri" pitchFamily="2" charset="-78"/>
               </a:rPr>
               <a:t>زُرْتُ الْجَامِعَاتُ.</a:t>
@@ -46527,6 +46783,7 @@
                   <a:srgbClr val="1F2A37"/>
                 </a:solidFill>
                 <a:latin typeface="Amiri" pitchFamily="2" charset="-78"/>
+                <a:ea typeface="Amiri" pitchFamily="2" charset="-78"/>
                 <a:cs typeface="Amiri" pitchFamily="2" charset="-78"/>
               </a:rPr>
               <a:t>السَّيَّارَاتُ جَدِيدَةٌ</a:t>
@@ -46628,6 +46885,7 @@
                   <a:srgbClr val="9AA1AB"/>
                 </a:solidFill>
                 <a:latin typeface="Amiri" pitchFamily="2" charset="-78"/>
+                <a:ea typeface="Amiri" pitchFamily="2" charset="-78"/>
                 <a:cs typeface="Amiri" pitchFamily="2" charset="-78"/>
               </a:rPr>
               <a:t>السَّيَّارَاتُ جَدِيدَاتٌ</a:t>
@@ -46729,6 +46987,7 @@
                   <a:srgbClr val="9AA1AB"/>
                 </a:solidFill>
                 <a:latin typeface="Amiri" pitchFamily="2" charset="-78"/>
+                <a:ea typeface="Amiri" pitchFamily="2" charset="-78"/>
                 <a:cs typeface="Amiri" pitchFamily="2" charset="-78"/>
               </a:rPr>
               <a:t>السَّيَّارَاتُ جُدُدٌ</a:t>
@@ -47010,6 +47269,7 @@
                   <a:srgbClr val="D4AF37"/>
                 </a:solidFill>
                 <a:latin typeface="Amiri" pitchFamily="2" charset="-78"/>
+                <a:ea typeface="Amiri" pitchFamily="2" charset="-78"/>
                 <a:cs typeface="Amiri" pitchFamily="2" charset="-78"/>
               </a:rPr>
               <a:t>م</a:t>
@@ -47330,6 +47590,7 @@
                   <a:srgbClr val="8A6D1E"/>
                 </a:solidFill>
                 <a:latin typeface="Amiri" pitchFamily="2" charset="-78"/>
+                <a:ea typeface="Amiri" pitchFamily="2" charset="-78"/>
                 <a:cs typeface="Amiri" pitchFamily="2" charset="-78"/>
               </a:rPr>
               <a:t>التَّحْضِيرُ لِلدَّرْسِ القَادِمِ</a:t>
@@ -47543,6 +47804,7 @@
                   <a:srgbClr val="1B3B6F"/>
                 </a:solidFill>
                 <a:latin typeface="Amiri" pitchFamily="2" charset="-78"/>
+                <a:ea typeface="Amiri" pitchFamily="2" charset="-78"/>
                 <a:cs typeface="Amiri" pitchFamily="2" charset="-78"/>
               </a:rPr>
               <a:t>جَمْعُ التَّكْسِيرِ</a:t>
@@ -47632,6 +47894,7 @@
                   <a:srgbClr val="1B3B6F"/>
                 </a:solidFill>
                 <a:latin typeface="Amiri" pitchFamily="2" charset="-78"/>
+                <a:ea typeface="Amiri" pitchFamily="2" charset="-78"/>
                 <a:cs typeface="Amiri" pitchFamily="2" charset="-78"/>
               </a:rPr>
               <a:t>كُتُبٌ</a:t>
@@ -47678,11 +47941,12 @@
               <a:buNone/>
             </a:pPr>
             <a:r>
-              <a:rPr lang="en-US" sz="1000" i="1" dirty="0">
+              <a:rPr lang="ar-SA" sz="1000" i="1" dirty="0">
                 <a:solidFill>
                   <a:srgbClr val="5A6472"/>
                 </a:solidFill>
                 <a:latin typeface="Calibri" pitchFamily="34" charset="0"/>
+                <a:ea typeface="Amiri" pitchFamily="2" charset="-78"/>
                 <a:cs typeface="Amiri" pitchFamily="2" charset="-78"/>
               </a:rPr>
               <a:t>  sing. كِتَابٌ</a:t>
@@ -47721,6 +47985,7 @@
                   <a:srgbClr val="1B3B6F"/>
                 </a:solidFill>
                 <a:latin typeface="Amiri" pitchFamily="2" charset="-78"/>
+                <a:ea typeface="Amiri" pitchFamily="2" charset="-78"/>
                 <a:cs typeface="Amiri" pitchFamily="2" charset="-78"/>
               </a:rPr>
               <a:t>أَوْلَادٌ</a:t>
@@ -47767,11 +48032,12 @@
               <a:buNone/>
             </a:pPr>
             <a:r>
-              <a:rPr lang="en-US" sz="1000" i="1" dirty="0">
+              <a:rPr lang="ar-SA" sz="1000" i="1" dirty="0">
                 <a:solidFill>
                   <a:srgbClr val="5A6472"/>
                 </a:solidFill>
                 <a:latin typeface="Calibri" pitchFamily="34" charset="0"/>
+                <a:ea typeface="Amiri" pitchFamily="2" charset="-78"/>
                 <a:cs typeface="Amiri" pitchFamily="2" charset="-78"/>
               </a:rPr>
               <a:t>  sing. وَلَدٌ</a:t>
@@ -47810,6 +48076,7 @@
                   <a:srgbClr val="1B3B6F"/>
                 </a:solidFill>
                 <a:latin typeface="Amiri" pitchFamily="2" charset="-78"/>
+                <a:ea typeface="Amiri" pitchFamily="2" charset="-78"/>
                 <a:cs typeface="Amiri" pitchFamily="2" charset="-78"/>
               </a:rPr>
               <a:t>بُيُوتٌ</a:t>
@@ -47856,11 +48123,12 @@
               <a:buNone/>
             </a:pPr>
             <a:r>
-              <a:rPr lang="en-US" sz="1000" i="1" dirty="0">
+              <a:rPr lang="ar-SA" sz="1000" i="1" dirty="0">
                 <a:solidFill>
                   <a:srgbClr val="5A6472"/>
                 </a:solidFill>
                 <a:latin typeface="Calibri" pitchFamily="34" charset="0"/>
+                <a:ea typeface="Amiri" pitchFamily="2" charset="-78"/>
                 <a:cs typeface="Amiri" pitchFamily="2" charset="-78"/>
               </a:rPr>
               <a:t>  sing. بَيْتٌ</a:t>
@@ -47899,6 +48167,7 @@
                   <a:srgbClr val="1B3B6F"/>
                 </a:solidFill>
                 <a:latin typeface="Amiri" pitchFamily="2" charset="-78"/>
+                <a:ea typeface="Amiri" pitchFamily="2" charset="-78"/>
                 <a:cs typeface="Amiri" pitchFamily="2" charset="-78"/>
               </a:rPr>
               <a:t>مَدَارِسُ</a:t>
@@ -47945,11 +48214,12 @@
               <a:buNone/>
             </a:pPr>
             <a:r>
-              <a:rPr lang="en-US" sz="1000" i="1" dirty="0">
+              <a:rPr lang="ar-SA" sz="1000" i="1" dirty="0">
                 <a:solidFill>
                   <a:srgbClr val="5A6472"/>
                 </a:solidFill>
                 <a:latin typeface="Calibri" pitchFamily="34" charset="0"/>
+                <a:ea typeface="Amiri" pitchFamily="2" charset="-78"/>
                 <a:cs typeface="Amiri" pitchFamily="2" charset="-78"/>
               </a:rPr>
               <a:t>  sing. مَدْرَسَةٌ</a:t>
@@ -48064,6 +48334,7 @@
                   <a:srgbClr val="1B3B6F"/>
                 </a:solidFill>
                 <a:latin typeface="Amiri" pitchFamily="2" charset="-78"/>
+                <a:ea typeface="Amiri" pitchFamily="2" charset="-78"/>
                 <a:cs typeface="Amiri" pitchFamily="2" charset="-78"/>
               </a:rPr>
               <a:t>كِتَابٌ · كُتُبٌ — بَيْتٌ · ______</a:t>
@@ -48733,6 +49004,7 @@
                   <a:srgbClr val="FFFFFF"/>
                 </a:solidFill>
                 <a:latin typeface="Amiri" pitchFamily="2" charset="-78"/>
+                <a:ea typeface="Amiri" pitchFamily="2" charset="-78"/>
                 <a:cs typeface="Amiri" pitchFamily="2" charset="-78"/>
               </a:rPr>
               <a:t>أَحْسَنْتُمْ! إِلَى اللِّقَاءِ</a:t>
@@ -48885,6 +49157,7 @@
                   <a:srgbClr val="D4AF37"/>
                 </a:solidFill>
                 <a:latin typeface="Amiri" pitchFamily="2" charset="-78"/>
+                <a:ea typeface="Amiri" pitchFamily="2" charset="-78"/>
                 <a:cs typeface="Amiri" pitchFamily="2" charset="-78"/>
               </a:rPr>
               <a:t>جَمْعُ التَّكْسِيرِ</a:t>
@@ -49018,6 +49291,7 @@
                   <a:srgbClr val="D4AF37"/>
                 </a:solidFill>
                 <a:latin typeface="Amiri" pitchFamily="2" charset="-78"/>
+                <a:ea typeface="Amiri" pitchFamily="2" charset="-78"/>
                 <a:cs typeface="Amiri" pitchFamily="2" charset="-78"/>
               </a:rPr>
               <a:t>م</a:t>
@@ -49338,6 +49612,7 @@
                   <a:srgbClr val="8A6D1E"/>
                 </a:solidFill>
                 <a:latin typeface="Amiri" pitchFamily="2" charset="-78"/>
+                <a:ea typeface="Amiri" pitchFamily="2" charset="-78"/>
                 <a:cs typeface="Amiri" pitchFamily="2" charset="-78"/>
               </a:rPr>
               <a:t>اِبْدَأِ الآنَ</a:t>
@@ -49524,6 +49799,7 @@
                   <a:srgbClr val="1B3B6F"/>
                 </a:solidFill>
                 <a:latin typeface="Amiri" pitchFamily="2" charset="-78"/>
+                <a:ea typeface="Amiri" pitchFamily="2" charset="-78"/>
                 <a:cs typeface="Amiri" pitchFamily="2" charset="-78"/>
               </a:rPr>
               <a:t>طَالِبَةٌ</a:t>
@@ -49638,6 +49914,7 @@
                   <a:srgbClr val="1F2A37"/>
                 </a:solidFill>
                 <a:latin typeface="Amiri" pitchFamily="2" charset="-78"/>
+                <a:ea typeface="Amiri" pitchFamily="2" charset="-78"/>
                 <a:cs typeface="Amiri" pitchFamily="2" charset="-78"/>
               </a:rPr>
               <a:t>طَالِبُونَ</a:t>
@@ -49739,6 +50016,7 @@
                   <a:srgbClr val="1F2A37"/>
                 </a:solidFill>
                 <a:latin typeface="Amiri" pitchFamily="2" charset="-78"/>
+                <a:ea typeface="Amiri" pitchFamily="2" charset="-78"/>
                 <a:cs typeface="Amiri" pitchFamily="2" charset="-78"/>
               </a:rPr>
               <a:t>طَالِبَاتٌ</a:t>
@@ -49840,6 +50118,7 @@
                   <a:srgbClr val="1F2A37"/>
                 </a:solidFill>
                 <a:latin typeface="Amiri" pitchFamily="2" charset="-78"/>
+                <a:ea typeface="Amiri" pitchFamily="2" charset="-78"/>
                 <a:cs typeface="Amiri" pitchFamily="2" charset="-78"/>
               </a:rPr>
               <a:t>طُلَّابٌ</a:t>
@@ -50076,6 +50355,7 @@
                   <a:srgbClr val="1F2A37"/>
                 </a:solidFill>
                 <a:latin typeface="Amiri" pitchFamily="2" charset="-78"/>
+                <a:ea typeface="Amiri" pitchFamily="2" charset="-78"/>
                 <a:cs typeface="Amiri" pitchFamily="2" charset="-78"/>
               </a:rPr>
               <a:t>الطَّالِبَاتُ</a:t>
@@ -50177,6 +50457,7 @@
                   <a:srgbClr val="1F2A37"/>
                 </a:solidFill>
                 <a:latin typeface="Amiri" pitchFamily="2" charset="-78"/>
+                <a:ea typeface="Amiri" pitchFamily="2" charset="-78"/>
                 <a:cs typeface="Amiri" pitchFamily="2" charset="-78"/>
               </a:rPr>
               <a:t>الطَّالِبَاتِ</a:t>
@@ -50278,6 +50559,7 @@
                   <a:srgbClr val="1F2A37"/>
                 </a:solidFill>
                 <a:latin typeface="Amiri" pitchFamily="2" charset="-78"/>
+                <a:ea typeface="Amiri" pitchFamily="2" charset="-78"/>
                 <a:cs typeface="Amiri" pitchFamily="2" charset="-78"/>
               </a:rPr>
               <a:t>الطَّالِبَاتَ</a:t>
@@ -50426,6 +50708,7 @@
                   <a:srgbClr val="1B3B6F"/>
                 </a:solidFill>
                 <a:latin typeface="Amiri" pitchFamily="2" charset="-78"/>
+                <a:ea typeface="Amiri" pitchFamily="2" charset="-78"/>
                 <a:cs typeface="Amiri" pitchFamily="2" charset="-78"/>
               </a:rPr>
               <a:t>مَعَ</a:t>
@@ -50540,6 +50823,7 @@
                   <a:srgbClr val="1F2A37"/>
                 </a:solidFill>
                 <a:latin typeface="Amiri" pitchFamily="2" charset="-78"/>
+                <a:ea typeface="Amiri" pitchFamily="2" charset="-78"/>
                 <a:cs typeface="Amiri" pitchFamily="2" charset="-78"/>
               </a:rPr>
               <a:t>الْمُعَلِّمَاتُ</a:t>
@@ -50641,6 +50925,7 @@
                   <a:srgbClr val="1F2A37"/>
                 </a:solidFill>
                 <a:latin typeface="Amiri" pitchFamily="2" charset="-78"/>
+                <a:ea typeface="Amiri" pitchFamily="2" charset="-78"/>
                 <a:cs typeface="Amiri" pitchFamily="2" charset="-78"/>
               </a:rPr>
               <a:t>الْمُعَلِّمَاتَ</a:t>
@@ -50742,6 +51027,7 @@
                   <a:srgbClr val="1F2A37"/>
                 </a:solidFill>
                 <a:latin typeface="Amiri" pitchFamily="2" charset="-78"/>
+                <a:ea typeface="Amiri" pitchFamily="2" charset="-78"/>
                 <a:cs typeface="Amiri" pitchFamily="2" charset="-78"/>
               </a:rPr>
               <a:t>الْمُعَلِّمَاتِ</a:t>
@@ -51416,6 +51702,7 @@
                   <a:srgbClr val="1F2A37"/>
                 </a:solidFill>
                 <a:latin typeface="Amiri" pitchFamily="2" charset="-78"/>
+                <a:ea typeface="Amiri" pitchFamily="2" charset="-78"/>
                 <a:cs typeface="Amiri" pitchFamily="2" charset="-78"/>
               </a:rPr>
               <a:t>الطَّالِبَاتُ مُجْتَهِدَاتٌ</a:t>
@@ -51517,6 +51804,7 @@
                   <a:srgbClr val="1F2A37"/>
                 </a:solidFill>
                 <a:latin typeface="Amiri" pitchFamily="2" charset="-78"/>
+                <a:ea typeface="Amiri" pitchFamily="2" charset="-78"/>
                 <a:cs typeface="Amiri" pitchFamily="2" charset="-78"/>
               </a:rPr>
               <a:t>الطَّالِبَاتُ مُجْتَهِدَةٌ</a:t>
@@ -51618,6 +51906,7 @@
                   <a:srgbClr val="1F2A37"/>
                 </a:solidFill>
                 <a:latin typeface="Amiri" pitchFamily="2" charset="-78"/>
+                <a:ea typeface="Amiri" pitchFamily="2" charset="-78"/>
                 <a:cs typeface="Amiri" pitchFamily="2" charset="-78"/>
               </a:rPr>
               <a:t>الطَّالِبَاتُ مُجْتَهِدُونَ</a:t>
@@ -51953,6 +52242,7 @@
                   <a:srgbClr val="D4AF37"/>
                 </a:solidFill>
                 <a:latin typeface="Amiri" pitchFamily="2" charset="-78"/>
+                <a:ea typeface="Amiri" pitchFamily="2" charset="-78"/>
                 <a:cs typeface="Amiri" pitchFamily="2" charset="-78"/>
               </a:rPr>
               <a:t>م</a:t>
@@ -52273,6 +52563,7 @@
                   <a:srgbClr val="8A6D1E"/>
                 </a:solidFill>
                 <a:latin typeface="Amiri" pitchFamily="2" charset="-78"/>
+                <a:ea typeface="Amiri" pitchFamily="2" charset="-78"/>
                 <a:cs typeface="Amiri" pitchFamily="2" charset="-78"/>
               </a:rPr>
               <a:t>الإِجَابَاتُ وَالتَّعْلِيلُ</a:t>
@@ -52459,6 +52750,7 @@
                   <a:srgbClr val="1B3B6F"/>
                 </a:solidFill>
                 <a:latin typeface="Amiri" pitchFamily="2" charset="-78"/>
+                <a:ea typeface="Amiri" pitchFamily="2" charset="-78"/>
                 <a:cs typeface="Amiri" pitchFamily="2" charset="-78"/>
               </a:rPr>
               <a:t>طَالِبَةٌ</a:t>
@@ -52573,6 +52865,7 @@
                   <a:srgbClr val="9AA1AB"/>
                 </a:solidFill>
                 <a:latin typeface="Amiri" pitchFamily="2" charset="-78"/>
+                <a:ea typeface="Amiri" pitchFamily="2" charset="-78"/>
                 <a:cs typeface="Amiri" pitchFamily="2" charset="-78"/>
               </a:rPr>
               <a:t>طَالِبُونَ</a:t>
@@ -52701,6 +52994,7 @@
                   <a:srgbClr val="1F2A37"/>
                 </a:solidFill>
                 <a:latin typeface="Amiri" pitchFamily="2" charset="-78"/>
+                <a:ea typeface="Amiri" pitchFamily="2" charset="-78"/>
                 <a:cs typeface="Amiri" pitchFamily="2" charset="-78"/>
               </a:rPr>
               <a:t>طَالِبَاتٌ</a:t>
@@ -52802,6 +53096,7 @@
                   <a:srgbClr val="9AA1AB"/>
                 </a:solidFill>
                 <a:latin typeface="Amiri" pitchFamily="2" charset="-78"/>
+                <a:ea typeface="Amiri" pitchFamily="2" charset="-78"/>
                 <a:cs typeface="Amiri" pitchFamily="2" charset="-78"/>
               </a:rPr>
               <a:t>طُلَّابٌ</a:t>
@@ -52853,6 +53148,7 @@
                   <a:srgbClr val="8A6D1E"/>
                 </a:solidFill>
                 <a:latin typeface="Amiri" pitchFamily="2" charset="-78"/>
+                <a:ea typeface="Amiri" pitchFamily="2" charset="-78"/>
                 <a:cs typeface="Amiri" pitchFamily="2" charset="-78"/>
               </a:rPr>
               <a:t>ة</a:t>
@@ -52879,6 +53175,7 @@
                   <a:srgbClr val="8A6D1E"/>
                 </a:solidFill>
                 <a:latin typeface="Amiri" pitchFamily="2" charset="-78"/>
+                <a:ea typeface="Amiri" pitchFamily="2" charset="-78"/>
                 <a:cs typeface="Amiri" pitchFamily="2" charset="-78"/>
               </a:rPr>
               <a:t>ات</a:t>
@@ -53155,6 +53452,7 @@
                   <a:srgbClr val="1F2A37"/>
                 </a:solidFill>
                 <a:latin typeface="Amiri" pitchFamily="2" charset="-78"/>
+                <a:ea typeface="Amiri" pitchFamily="2" charset="-78"/>
                 <a:cs typeface="Amiri" pitchFamily="2" charset="-78"/>
               </a:rPr>
               <a:t>الطَّالِبَاتُ</a:t>
@@ -53256,6 +53554,7 @@
                   <a:srgbClr val="9AA1AB"/>
                 </a:solidFill>
                 <a:latin typeface="Amiri" pitchFamily="2" charset="-78"/>
+                <a:ea typeface="Amiri" pitchFamily="2" charset="-78"/>
                 <a:cs typeface="Amiri" pitchFamily="2" charset="-78"/>
               </a:rPr>
               <a:t>الطَّالِبَاتِ</a:t>
@@ -53357,6 +53656,7 @@
                   <a:srgbClr val="9AA1AB"/>
                 </a:solidFill>
                 <a:latin typeface="Amiri" pitchFamily="2" charset="-78"/>
+                <a:ea typeface="Amiri" pitchFamily="2" charset="-78"/>
                 <a:cs typeface="Amiri" pitchFamily="2" charset="-78"/>
               </a:rPr>
               <a:t>الطَّالِبَاتَ</a:t>
@@ -53543,6 +53843,7 @@
                   <a:srgbClr val="1B3B6F"/>
                 </a:solidFill>
                 <a:latin typeface="Amiri" pitchFamily="2" charset="-78"/>
+                <a:ea typeface="Amiri" pitchFamily="2" charset="-78"/>
                 <a:cs typeface="Amiri" pitchFamily="2" charset="-78"/>
               </a:rPr>
               <a:t>مَعَ</a:t>
@@ -53657,6 +53958,7 @@
                   <a:srgbClr val="9AA1AB"/>
                 </a:solidFill>
                 <a:latin typeface="Amiri" pitchFamily="2" charset="-78"/>
+                <a:ea typeface="Amiri" pitchFamily="2" charset="-78"/>
                 <a:cs typeface="Amiri" pitchFamily="2" charset="-78"/>
               </a:rPr>
               <a:t>الْمُعَلِّمَاتُ</a:t>
@@ -53758,6 +54060,7 @@
                   <a:srgbClr val="9AA1AB"/>
                 </a:solidFill>
                 <a:latin typeface="Amiri" pitchFamily="2" charset="-78"/>
+                <a:ea typeface="Amiri" pitchFamily="2" charset="-78"/>
                 <a:cs typeface="Amiri" pitchFamily="2" charset="-78"/>
               </a:rPr>
               <a:t>الْمُعَلِّمَاتَ</a:t>
@@ -53886,6 +54189,7 @@
                   <a:srgbClr val="1F2A37"/>
                 </a:solidFill>
                 <a:latin typeface="Amiri" pitchFamily="2" charset="-78"/>
+                <a:ea typeface="Amiri" pitchFamily="2" charset="-78"/>
                 <a:cs typeface="Amiri" pitchFamily="2" charset="-78"/>
               </a:rPr>
               <a:t>الْمُعَلِّمَاتِ</a:t>
@@ -54690,6 +54994,7 @@
                   <a:srgbClr val="1F2A37"/>
                 </a:solidFill>
                 <a:latin typeface="Amiri" pitchFamily="2" charset="-78"/>
+                <a:ea typeface="Amiri" pitchFamily="2" charset="-78"/>
                 <a:cs typeface="Amiri" pitchFamily="2" charset="-78"/>
               </a:rPr>
               <a:t>الطَّالِبَاتُ مُجْتَهِدَاتٌ</a:t>
@@ -54791,6 +55096,7 @@
                   <a:srgbClr val="9AA1AB"/>
                 </a:solidFill>
                 <a:latin typeface="Amiri" pitchFamily="2" charset="-78"/>
+                <a:ea typeface="Amiri" pitchFamily="2" charset="-78"/>
                 <a:cs typeface="Amiri" pitchFamily="2" charset="-78"/>
               </a:rPr>
               <a:t>الطَّالِبَاتُ مُجْتَهِدَةٌ</a:t>
@@ -54892,6 +55198,7 @@
                   <a:srgbClr val="9AA1AB"/>
                 </a:solidFill>
                 <a:latin typeface="Amiri" pitchFamily="2" charset="-78"/>
+                <a:ea typeface="Amiri" pitchFamily="2" charset="-78"/>
                 <a:cs typeface="Amiri" pitchFamily="2" charset="-78"/>
               </a:rPr>
               <a:t>الطَّالِبَاتُ مُجْتَهِدُونَ</a:t>
@@ -55081,6 +55388,7 @@
                   <a:srgbClr val="1B3B6F"/>
                 </a:solidFill>
                 <a:latin typeface="Amiri" pitchFamily="2" charset="-78"/>
+                <a:ea typeface="Amiri" pitchFamily="2" charset="-78"/>
                 <a:cs typeface="Amiri" pitchFamily="2" charset="-78"/>
               </a:rPr>
               <a:t>حَضَرَتِ </a:t>
@@ -55097,6 +55405,7 @@
                   <a:srgbClr val="0E7C86"/>
                 </a:solidFill>
                 <a:latin typeface="Amiri" pitchFamily="2" charset="-78"/>
+                <a:ea typeface="Amiri" pitchFamily="2" charset="-78"/>
                 <a:cs typeface="Amiri" pitchFamily="2" charset="-78"/>
               </a:rPr>
               <a:t>الطَّالِبَاتُ</a:t>
@@ -55113,6 +55422,7 @@
                   <a:srgbClr val="1B3B6F"/>
                 </a:solidFill>
                 <a:latin typeface="Amiri" pitchFamily="2" charset="-78"/>
+                <a:ea typeface="Amiri" pitchFamily="2" charset="-78"/>
                 <a:cs typeface="Amiri" pitchFamily="2" charset="-78"/>
               </a:rPr>
               <a:t> ‖ رَأَيْتُ </a:t>
@@ -55129,6 +55439,7 @@
                   <a:srgbClr val="D6336C"/>
                 </a:solidFill>
                 <a:latin typeface="Amiri" pitchFamily="2" charset="-78"/>
+                <a:ea typeface="Amiri" pitchFamily="2" charset="-78"/>
                 <a:cs typeface="Amiri" pitchFamily="2" charset="-78"/>
               </a:rPr>
               <a:t>الطَّالِبَاتِ</a:t>
@@ -55262,6 +55573,7 @@
                   <a:srgbClr val="D4AF37"/>
                 </a:solidFill>
                 <a:latin typeface="Amiri" pitchFamily="2" charset="-78"/>
+                <a:ea typeface="Amiri" pitchFamily="2" charset="-78"/>
                 <a:cs typeface="Amiri" pitchFamily="2" charset="-78"/>
               </a:rPr>
               <a:t>م</a:t>
@@ -55582,6 +55894,7 @@
                   <a:srgbClr val="8A6D1E"/>
                 </a:solidFill>
                 <a:latin typeface="Amiri" pitchFamily="2" charset="-78"/>
+                <a:ea typeface="Amiri" pitchFamily="2" charset="-78"/>
                 <a:cs typeface="Amiri" pitchFamily="2" charset="-78"/>
               </a:rPr>
               <a:t>الأَهْدَافُ وَمَعَايِيرُ النَّجَاحِ</a:t>
@@ -55730,6 +56043,7 @@
                   <a:srgbClr val="8A6D1E"/>
                 </a:solidFill>
                 <a:latin typeface="Amiri" pitchFamily="2" charset="-78"/>
+                <a:ea typeface="Amiri" pitchFamily="2" charset="-78"/>
                 <a:cs typeface="Amiri" pitchFamily="2" charset="-78"/>
               </a:rPr>
               <a:t>سَتَتَعَلَّمُ اليَوْمَ</a:t>
@@ -56885,6 +57199,7 @@
                   <a:srgbClr val="D4AF37"/>
                 </a:solidFill>
                 <a:latin typeface="Amiri" pitchFamily="2" charset="-78"/>
+                <a:ea typeface="Amiri" pitchFamily="2" charset="-78"/>
                 <a:cs typeface="Amiri" pitchFamily="2" charset="-78"/>
               </a:rPr>
               <a:t>م</a:t>
@@ -57205,6 +57520,7 @@
                   <a:srgbClr val="8A6D1E"/>
                 </a:solidFill>
                 <a:latin typeface="Amiri" pitchFamily="2" charset="-78"/>
+                <a:ea typeface="Amiri" pitchFamily="2" charset="-78"/>
                 <a:cs typeface="Amiri" pitchFamily="2" charset="-78"/>
               </a:rPr>
               <a:t>مُصْطَلَحَاتُ الدَّرْسِ</a:t>
@@ -57443,6 +57759,7 @@
                   <a:srgbClr val="1B3B6F"/>
                 </a:solidFill>
                 <a:latin typeface="Amiri" pitchFamily="2" charset="-78"/>
+                <a:ea typeface="Amiri" pitchFamily="2" charset="-78"/>
                 <a:cs typeface="Amiri" pitchFamily="2" charset="-78"/>
               </a:rPr>
               <a:t>جَمْعُ الْمُؤَنَّثِ السَّالِمُ</a:t>
@@ -57535,6 +57852,7 @@
                   <a:srgbClr val="8A6D1E"/>
                 </a:solidFill>
                 <a:latin typeface="Amiri" pitchFamily="2" charset="-78"/>
+                <a:ea typeface="Amiri" pitchFamily="2" charset="-78"/>
                 <a:cs typeface="Amiri" pitchFamily="2" charset="-78"/>
               </a:rPr>
               <a:t>طَالِبَةٌ · طَالِبَاتٌ</a:t>
@@ -57735,6 +58053,7 @@
                   <a:srgbClr val="1B3B6F"/>
                 </a:solidFill>
                 <a:latin typeface="Amiri" pitchFamily="2" charset="-78"/>
+                <a:ea typeface="Amiri" pitchFamily="2" charset="-78"/>
                 <a:cs typeface="Amiri" pitchFamily="2" charset="-78"/>
               </a:rPr>
               <a:t>ـَاتٌ</a:t>
@@ -57827,6 +58146,7 @@
                   <a:srgbClr val="8A6D1E"/>
                 </a:solidFill>
                 <a:latin typeface="Amiri" pitchFamily="2" charset="-78"/>
+                <a:ea typeface="Amiri" pitchFamily="2" charset="-78"/>
                 <a:cs typeface="Amiri" pitchFamily="2" charset="-78"/>
               </a:rPr>
               <a:t>طَالِبَاتٌ</a:t>
@@ -58027,6 +58347,7 @@
                   <a:srgbClr val="1B3B6F"/>
                 </a:solidFill>
                 <a:latin typeface="Amiri" pitchFamily="2" charset="-78"/>
+                <a:ea typeface="Amiri" pitchFamily="2" charset="-78"/>
                 <a:cs typeface="Amiri" pitchFamily="2" charset="-78"/>
               </a:rPr>
               <a:t>ـَاتُ</a:t>
@@ -58119,6 +58440,7 @@
                   <a:srgbClr val="8A6D1E"/>
                 </a:solidFill>
                 <a:latin typeface="Amiri" pitchFamily="2" charset="-78"/>
+                <a:ea typeface="Amiri" pitchFamily="2" charset="-78"/>
                 <a:cs typeface="Amiri" pitchFamily="2" charset="-78"/>
               </a:rPr>
               <a:t>حَضَرَتِ الطَّالِبَاتُ</a:t>
@@ -58319,6 +58641,7 @@
                   <a:srgbClr val="1B3B6F"/>
                 </a:solidFill>
                 <a:latin typeface="Amiri" pitchFamily="2" charset="-78"/>
+                <a:ea typeface="Amiri" pitchFamily="2" charset="-78"/>
                 <a:cs typeface="Amiri" pitchFamily="2" charset="-78"/>
               </a:rPr>
               <a:t>ـَاتِ</a:t>
@@ -58411,6 +58734,7 @@
                   <a:srgbClr val="8A6D1E"/>
                 </a:solidFill>
                 <a:latin typeface="Amiri" pitchFamily="2" charset="-78"/>
+                <a:ea typeface="Amiri" pitchFamily="2" charset="-78"/>
                 <a:cs typeface="Amiri" pitchFamily="2" charset="-78"/>
               </a:rPr>
               <a:t>رَأَيْتُ الطَّالِبَاتِ</a:t>
@@ -58611,6 +58935,7 @@
                   <a:srgbClr val="1B3B6F"/>
                 </a:solidFill>
                 <a:latin typeface="Amiri" pitchFamily="2" charset="-78"/>
+                <a:ea typeface="Amiri" pitchFamily="2" charset="-78"/>
                 <a:cs typeface="Amiri" pitchFamily="2" charset="-78"/>
               </a:rPr>
               <a:t>جَمْعُ التَّكْسِيرِ</a:t>
@@ -58703,6 +59028,7 @@
                   <a:srgbClr val="8A6D1E"/>
                 </a:solidFill>
                 <a:latin typeface="Amiri" pitchFamily="2" charset="-78"/>
+                <a:ea typeface="Amiri" pitchFamily="2" charset="-78"/>
                 <a:cs typeface="Amiri" pitchFamily="2" charset="-78"/>
               </a:rPr>
               <a:t>مَدْرَسَةٌ · مَدَارِسُ</a:t>
@@ -58903,6 +59229,7 @@
                   <a:srgbClr val="1B3B6F"/>
                 </a:solidFill>
                 <a:latin typeface="Amiri" pitchFamily="2" charset="-78"/>
+                <a:ea typeface="Amiri" pitchFamily="2" charset="-78"/>
                 <a:cs typeface="Amiri" pitchFamily="2" charset="-78"/>
               </a:rPr>
               <a:t>كَسْرَةٌ</a:t>
@@ -59128,6 +59455,7 @@
                   <a:srgbClr val="D4AF37"/>
                 </a:solidFill>
                 <a:latin typeface="Amiri" pitchFamily="2" charset="-78"/>
+                <a:ea typeface="Amiri" pitchFamily="2" charset="-78"/>
                 <a:cs typeface="Amiri" pitchFamily="2" charset="-78"/>
               </a:rPr>
               <a:t>م</a:t>
@@ -59448,6 +59776,7 @@
                   <a:srgbClr val="8A6D1E"/>
                 </a:solidFill>
                 <a:latin typeface="Amiri" pitchFamily="2" charset="-78"/>
+                <a:ea typeface="Amiri" pitchFamily="2" charset="-78"/>
                 <a:cs typeface="Amiri" pitchFamily="2" charset="-78"/>
               </a:rPr>
               <a:t>مِنَ التَّاءِ الْمَرْبُوطَةِ إِلَى «ات»</a:t>
@@ -60173,6 +60502,7 @@
                   <a:srgbClr val="1B3B6F"/>
                 </a:solidFill>
                 <a:latin typeface="Amiri" pitchFamily="2" charset="-78"/>
+                <a:ea typeface="Amiri" pitchFamily="2" charset="-78"/>
                 <a:cs typeface="Amiri" pitchFamily="2" charset="-78"/>
               </a:rPr>
               <a:t>طَالِبَةٌ · طَالِبَاتٌ</a:t>
@@ -60272,6 +60602,7 @@
                   <a:srgbClr val="1B3B6F"/>
                 </a:solidFill>
                 <a:latin typeface="Amiri" pitchFamily="2" charset="-78"/>
+                <a:ea typeface="Amiri" pitchFamily="2" charset="-78"/>
                 <a:cs typeface="Amiri" pitchFamily="2" charset="-78"/>
               </a:rPr>
               <a:t>مُعَلِّمَةٌ · مُعَلِّمَاتٌ</a:t>
@@ -60371,6 +60702,7 @@
                   <a:srgbClr val="1B3B6F"/>
                 </a:solidFill>
                 <a:latin typeface="Amiri" pitchFamily="2" charset="-78"/>
+                <a:ea typeface="Amiri" pitchFamily="2" charset="-78"/>
                 <a:cs typeface="Amiri" pitchFamily="2" charset="-78"/>
               </a:rPr>
               <a:t>سَيَّارَةٌ · سَيَّارَاتٌ</a:t>
@@ -60470,6 +60802,7 @@
                   <a:srgbClr val="1B3B6F"/>
                 </a:solidFill>
                 <a:latin typeface="Amiri" pitchFamily="2" charset="-78"/>
+                <a:ea typeface="Amiri" pitchFamily="2" charset="-78"/>
                 <a:cs typeface="Amiri" pitchFamily="2" charset="-78"/>
               </a:rPr>
               <a:t>مَدْرَسَةٌ · مَدَارِسُ</a:t>
@@ -60751,6 +61084,7 @@
                   <a:srgbClr val="D4AF37"/>
                 </a:solidFill>
                 <a:latin typeface="Amiri" pitchFamily="2" charset="-78"/>
+                <a:ea typeface="Amiri" pitchFamily="2" charset="-78"/>
                 <a:cs typeface="Amiri" pitchFamily="2" charset="-78"/>
               </a:rPr>
               <a:t>م</a:t>
@@ -61071,6 +61405,7 @@
                   <a:srgbClr val="8A6D1E"/>
                 </a:solidFill>
                 <a:latin typeface="Amiri" pitchFamily="2" charset="-78"/>
+                <a:ea typeface="Amiri" pitchFamily="2" charset="-78"/>
                 <a:cs typeface="Amiri" pitchFamily="2" charset="-78"/>
               </a:rPr>
               <a:t>ـَاتُ وَـَاتِ</a:t>
@@ -61351,6 +61686,7 @@
                   <a:srgbClr val="1B3B6F"/>
                 </a:solidFill>
                 <a:latin typeface="Amiri" pitchFamily="2" charset="-78"/>
+                <a:ea typeface="Amiri" pitchFamily="2" charset="-78"/>
                 <a:cs typeface="Amiri" pitchFamily="2" charset="-78"/>
               </a:rPr>
               <a:t>حَضَرَتِ الطَّالِبَاتُ.</a:t>
@@ -61557,6 +61893,7 @@
                   <a:srgbClr val="1B3B6F"/>
                 </a:solidFill>
                 <a:latin typeface="Amiri" pitchFamily="2" charset="-78"/>
+                <a:ea typeface="Amiri" pitchFamily="2" charset="-78"/>
                 <a:cs typeface="Amiri" pitchFamily="2" charset="-78"/>
               </a:rPr>
               <a:t>رَأَيْتُ الطَّالِبَاتِ.</a:t>
@@ -61763,6 +62100,7 @@
                   <a:srgbClr val="1B3B6F"/>
                 </a:solidFill>
                 <a:latin typeface="Amiri" pitchFamily="2" charset="-78"/>
+                <a:ea typeface="Amiri" pitchFamily="2" charset="-78"/>
                 <a:cs typeface="Amiri" pitchFamily="2" charset="-78"/>
               </a:rPr>
               <a:t>تَحَدَّثْتُ مَعَ الطَّالِبَاتِ.</a:t>
@@ -61969,6 +62307,7 @@
                   <a:srgbClr val="1B3B6F"/>
                 </a:solidFill>
                 <a:latin typeface="Amiri" pitchFamily="2" charset="-78"/>
+                <a:ea typeface="Amiri" pitchFamily="2" charset="-78"/>
                 <a:cs typeface="Amiri" pitchFamily="2" charset="-78"/>
               </a:rPr>
               <a:t>فِي الصَّفِّ طَالِبَاتٌ.</a:t>
@@ -62110,6 +62449,7 @@
                   <a:srgbClr val="1B3B6F"/>
                 </a:solidFill>
                 <a:latin typeface="Amiri" pitchFamily="2" charset="-78"/>
+                <a:ea typeface="Amiri" pitchFamily="2" charset="-78"/>
                 <a:cs typeface="Amiri" pitchFamily="2" charset="-78"/>
               </a:rPr>
               <a:t>رَأَيْتُ طَالِبَاتٍ.</a:t>
@@ -62284,13 +62624,9 @@
     <a:fontScheme name="Office">
       <a:majorFont>
         <a:latin typeface="Calibri Light" panose="020F0302020204030204"/>
-        <a:ea typeface=""/>
-        <a:cs typeface=""/>
-        <a:font script="Jpan" typeface="游ゴシック Light"/>
-        <a:font script="Hang" typeface="맑은 고딕"/>
-        <a:font script="Hans" typeface="等线 Light"/>
-        <a:font script="Hant" typeface="新細明體"/>
-        <a:font script="Arab" typeface="Times New Roman"/>
+        <a:ea typeface="Amiri" pitchFamily="2" charset="-78"/>
+        <a:cs typeface="Amiri" pitchFamily="2" charset="-78"/>
+        <a:font script="Arab" typeface="Amiri"/>
         <a:font script="Hebr" typeface="Times New Roman"/>
         <a:font script="Thai" typeface="Angsana New"/>
         <a:font script="Ethi" typeface="Nyala"/>
@@ -62336,13 +62672,9 @@
       </a:majorFont>
       <a:minorFont>
         <a:latin typeface="Calibri" panose="020F0502020204030204"/>
-        <a:ea typeface=""/>
-        <a:cs typeface=""/>
-        <a:font script="Jpan" typeface="游ゴシック"/>
-        <a:font script="Hang" typeface="맑은 고딕"/>
-        <a:font script="Hans" typeface="等线"/>
-        <a:font script="Hant" typeface="新細明體"/>
-        <a:font script="Arab" typeface="Arial"/>
+        <a:ea typeface="Amiri" pitchFamily="2" charset="-78"/>
+        <a:cs typeface="Amiri" pitchFamily="2" charset="-78"/>
+        <a:font script="Arab" typeface="Amiri"/>
         <a:font script="Hebr" typeface="Arial"/>
         <a:font script="Thai" typeface="Cordia New"/>
         <a:font script="Ethi" typeface="Nyala"/>
